--- a/docs/Abschlusspräsentation/DualNet-Abschlusspraesentation.pptx
+++ b/docs/Abschlusspräsentation/DualNet-Abschlusspraesentation.pptx
@@ -130,7 +130,7 @@
 <file path=ppt/charts/chart1.xml><?xml version="1.0" encoding="utf-8"?>
 <c:chartSpace xmlns:c="http://schemas.openxmlformats.org/drawingml/2006/chart" xmlns:a="http://schemas.openxmlformats.org/drawingml/2006/main" xmlns:r="http://schemas.openxmlformats.org/officeDocument/2006/relationships" xmlns:c16r2="http://schemas.microsoft.com/office/drawing/2015/06/chart">
   <c:date1904 val="0"/>
-  <c:lang val="de-DE"/>
+  <c:lang val="en-GB"/>
   <c:roundedCorners val="1"/>
   <c:style val="2"/>
   <c:chart>
@@ -226,16 +226,16 @@
                 <c:formatCode>General</c:formatCode>
                 <c:ptCount val="4"/>
                 <c:pt idx="0">
-                  <c:v>21</c:v>
+                  <c:v>15</c:v>
                 </c:pt>
                 <c:pt idx="1">
-                  <c:v>13</c:v>
+                  <c:v>12</c:v>
                 </c:pt>
                 <c:pt idx="2">
-                  <c:v>5</c:v>
+                  <c:v>10</c:v>
                 </c:pt>
                 <c:pt idx="3">
-                  <c:v>2</c:v>
+                  <c:v>11</c:v>
                 </c:pt>
               </c:numCache>
             </c:numRef>
@@ -459,7 +459,7 @@
           </a:lstStyle>
           <a:p>
             <a:fld id="{2C6FE2B1-7DD4-484D-B491-7F5E59DD1992}" type="datetimeFigureOut">
-              <a:t>17.06.2026</a:t>
+              <a:t>10.07.26</a:t>
             </a:fld>
             <a:endParaRPr lang="de-DE"/>
           </a:p>
@@ -616,7 +616,7 @@
           </a:lstStyle>
           <a:p>
             <a:fld id="{C7D26DEE-4C85-4866-B375-68EE82F4C28C}" type="slidenum">
-              <a:t>‹Nr.›</a:t>
+              <a:t>‹#›</a:t>
             </a:fld>
             <a:endParaRPr lang="de-DE"/>
           </a:p>
@@ -2655,6 +2655,13 @@
           </a:solidFill>
           <a:ln/>
         </p:spPr>
+        <p:txBody>
+          <a:bodyPr/>
+          <a:lstStyle/>
+          <a:p>
+            <a:endParaRPr lang="en-DE"/>
+          </a:p>
+        </p:txBody>
       </p:sp>
       <p:sp>
         <p:nvSpPr>
@@ -2675,6 +2682,13 @@
           </a:solidFill>
           <a:ln/>
         </p:spPr>
+        <p:txBody>
+          <a:bodyPr/>
+          <a:lstStyle/>
+          <a:p>
+            <a:endParaRPr lang="en-DE"/>
+          </a:p>
+        </p:txBody>
       </p:sp>
       <p:sp>
         <p:nvSpPr>
@@ -2698,6 +2712,13 @@
             <a:prstDash val="solid"/>
           </a:ln>
         </p:spPr>
+        <p:txBody>
+          <a:bodyPr/>
+          <a:lstStyle/>
+          <a:p>
+            <a:endParaRPr lang="en-DE"/>
+          </a:p>
+        </p:txBody>
       </p:sp>
       <p:sp>
         <p:nvSpPr>
@@ -2721,6 +2742,13 @@
             <a:prstDash val="solid"/>
           </a:ln>
         </p:spPr>
+        <p:txBody>
+          <a:bodyPr/>
+          <a:lstStyle/>
+          <a:p>
+            <a:endParaRPr lang="en-DE"/>
+          </a:p>
+        </p:txBody>
       </p:sp>
       <p:sp>
         <p:nvSpPr>
@@ -2744,6 +2772,13 @@
             <a:prstDash val="solid"/>
           </a:ln>
         </p:spPr>
+        <p:txBody>
+          <a:bodyPr/>
+          <a:lstStyle/>
+          <a:p>
+            <a:endParaRPr lang="en-DE"/>
+          </a:p>
+        </p:txBody>
       </p:sp>
       <p:sp>
         <p:nvSpPr>
@@ -2767,6 +2802,13 @@
             <a:prstDash val="solid"/>
           </a:ln>
         </p:spPr>
+        <p:txBody>
+          <a:bodyPr/>
+          <a:lstStyle/>
+          <a:p>
+            <a:endParaRPr lang="en-DE"/>
+          </a:p>
+        </p:txBody>
       </p:sp>
       <p:sp>
         <p:nvSpPr>
@@ -2790,6 +2832,13 @@
             <a:prstDash val="solid"/>
           </a:ln>
         </p:spPr>
+        <p:txBody>
+          <a:bodyPr/>
+          <a:lstStyle/>
+          <a:p>
+            <a:endParaRPr lang="en-DE"/>
+          </a:p>
+        </p:txBody>
       </p:sp>
       <p:sp>
         <p:nvSpPr>
@@ -2813,6 +2862,13 @@
             <a:prstDash val="solid"/>
           </a:ln>
         </p:spPr>
+        <p:txBody>
+          <a:bodyPr/>
+          <a:lstStyle/>
+          <a:p>
+            <a:endParaRPr lang="en-DE"/>
+          </a:p>
+        </p:txBody>
       </p:sp>
       <p:sp>
         <p:nvSpPr>
@@ -2836,6 +2892,13 @@
             <a:prstDash val="solid"/>
           </a:ln>
         </p:spPr>
+        <p:txBody>
+          <a:bodyPr/>
+          <a:lstStyle/>
+          <a:p>
+            <a:endParaRPr lang="en-DE"/>
+          </a:p>
+        </p:txBody>
       </p:sp>
       <p:sp>
         <p:nvSpPr>
@@ -2856,6 +2919,13 @@
           </a:solidFill>
           <a:ln/>
         </p:spPr>
+        <p:txBody>
+          <a:bodyPr/>
+          <a:lstStyle/>
+          <a:p>
+            <a:endParaRPr lang="en-DE"/>
+          </a:p>
+        </p:txBody>
       </p:sp>
       <p:sp>
         <p:nvSpPr>
@@ -2876,6 +2946,13 @@
           </a:solidFill>
           <a:ln/>
         </p:spPr>
+        <p:txBody>
+          <a:bodyPr/>
+          <a:lstStyle/>
+          <a:p>
+            <a:endParaRPr lang="en-DE"/>
+          </a:p>
+        </p:txBody>
       </p:sp>
       <p:sp>
         <p:nvSpPr>
@@ -2896,6 +2973,13 @@
           </a:solidFill>
           <a:ln/>
         </p:spPr>
+        <p:txBody>
+          <a:bodyPr/>
+          <a:lstStyle/>
+          <a:p>
+            <a:endParaRPr lang="en-DE"/>
+          </a:p>
+        </p:txBody>
       </p:sp>
       <p:sp>
         <p:nvSpPr>
@@ -2916,6 +3000,13 @@
           </a:solidFill>
           <a:ln/>
         </p:spPr>
+        <p:txBody>
+          <a:bodyPr/>
+          <a:lstStyle/>
+          <a:p>
+            <a:endParaRPr lang="en-DE"/>
+          </a:p>
+        </p:txBody>
       </p:sp>
       <p:sp>
         <p:nvSpPr>
@@ -2936,6 +3027,13 @@
           </a:solidFill>
           <a:ln/>
         </p:spPr>
+        <p:txBody>
+          <a:bodyPr/>
+          <a:lstStyle/>
+          <a:p>
+            <a:endParaRPr lang="en-DE"/>
+          </a:p>
+        </p:txBody>
       </p:sp>
       <p:sp>
         <p:nvSpPr>
@@ -2956,6 +3054,13 @@
           </a:solidFill>
           <a:ln/>
         </p:spPr>
+        <p:txBody>
+          <a:bodyPr/>
+          <a:lstStyle/>
+          <a:p>
+            <a:endParaRPr lang="en-DE"/>
+          </a:p>
+        </p:txBody>
       </p:sp>
       <p:sp>
         <p:nvSpPr>
@@ -2979,6 +3084,13 @@
             <a:prstDash val="solid"/>
           </a:ln>
         </p:spPr>
+        <p:txBody>
+          <a:bodyPr/>
+          <a:lstStyle/>
+          <a:p>
+            <a:endParaRPr lang="en-DE"/>
+          </a:p>
+        </p:txBody>
       </p:sp>
       <p:sp>
         <p:nvSpPr>
@@ -3002,6 +3114,13 @@
             <a:prstDash val="solid"/>
           </a:ln>
         </p:spPr>
+        <p:txBody>
+          <a:bodyPr/>
+          <a:lstStyle/>
+          <a:p>
+            <a:endParaRPr lang="en-DE"/>
+          </a:p>
+        </p:txBody>
       </p:sp>
       <p:sp>
         <p:nvSpPr>
@@ -3025,6 +3144,13 @@
             <a:prstDash val="solid"/>
           </a:ln>
         </p:spPr>
+        <p:txBody>
+          <a:bodyPr/>
+          <a:lstStyle/>
+          <a:p>
+            <a:endParaRPr lang="en-DE"/>
+          </a:p>
+        </p:txBody>
       </p:sp>
       <p:sp>
         <p:nvSpPr>
@@ -3048,6 +3174,13 @@
             <a:prstDash val="solid"/>
           </a:ln>
         </p:spPr>
+        <p:txBody>
+          <a:bodyPr/>
+          <a:lstStyle/>
+          <a:p>
+            <a:endParaRPr lang="en-DE"/>
+          </a:p>
+        </p:txBody>
       </p:sp>
       <p:sp>
         <p:nvSpPr>
@@ -3071,6 +3204,13 @@
             <a:prstDash val="solid"/>
           </a:ln>
         </p:spPr>
+        <p:txBody>
+          <a:bodyPr/>
+          <a:lstStyle/>
+          <a:p>
+            <a:endParaRPr lang="en-DE"/>
+          </a:p>
+        </p:txBody>
       </p:sp>
       <p:sp>
         <p:nvSpPr>
@@ -3094,6 +3234,13 @@
             <a:prstDash val="solid"/>
           </a:ln>
         </p:spPr>
+        <p:txBody>
+          <a:bodyPr/>
+          <a:lstStyle/>
+          <a:p>
+            <a:endParaRPr lang="en-DE"/>
+          </a:p>
+        </p:txBody>
       </p:sp>
       <p:sp>
         <p:nvSpPr>
@@ -3117,6 +3264,13 @@
             <a:prstDash val="solid"/>
           </a:ln>
         </p:spPr>
+        <p:txBody>
+          <a:bodyPr/>
+          <a:lstStyle/>
+          <a:p>
+            <a:endParaRPr lang="en-DE"/>
+          </a:p>
+        </p:txBody>
       </p:sp>
       <p:sp>
         <p:nvSpPr>
@@ -3137,6 +3291,13 @@
           </a:solidFill>
           <a:ln/>
         </p:spPr>
+        <p:txBody>
+          <a:bodyPr/>
+          <a:lstStyle/>
+          <a:p>
+            <a:endParaRPr lang="en-DE"/>
+          </a:p>
+        </p:txBody>
       </p:sp>
       <p:sp>
         <p:nvSpPr>
@@ -3157,6 +3318,13 @@
           </a:solidFill>
           <a:ln/>
         </p:spPr>
+        <p:txBody>
+          <a:bodyPr/>
+          <a:lstStyle/>
+          <a:p>
+            <a:endParaRPr lang="en-DE"/>
+          </a:p>
+        </p:txBody>
       </p:sp>
       <p:sp>
         <p:nvSpPr>
@@ -3177,6 +3345,13 @@
           </a:solidFill>
           <a:ln/>
         </p:spPr>
+        <p:txBody>
+          <a:bodyPr/>
+          <a:lstStyle/>
+          <a:p>
+            <a:endParaRPr lang="en-DE"/>
+          </a:p>
+        </p:txBody>
       </p:sp>
       <p:sp>
         <p:nvSpPr>
@@ -3197,6 +3372,13 @@
           </a:solidFill>
           <a:ln/>
         </p:spPr>
+        <p:txBody>
+          <a:bodyPr/>
+          <a:lstStyle/>
+          <a:p>
+            <a:endParaRPr lang="en-DE"/>
+          </a:p>
+        </p:txBody>
       </p:sp>
       <p:sp>
         <p:nvSpPr>
@@ -3217,6 +3399,13 @@
           </a:solidFill>
           <a:ln/>
         </p:spPr>
+        <p:txBody>
+          <a:bodyPr/>
+          <a:lstStyle/>
+          <a:p>
+            <a:endParaRPr lang="en-DE"/>
+          </a:p>
+        </p:txBody>
       </p:sp>
       <p:sp>
         <p:nvSpPr>
@@ -3237,6 +3426,13 @@
           </a:solidFill>
           <a:ln/>
         </p:spPr>
+        <p:txBody>
+          <a:bodyPr/>
+          <a:lstStyle/>
+          <a:p>
+            <a:endParaRPr lang="en-DE"/>
+          </a:p>
+        </p:txBody>
       </p:sp>
       <p:sp>
         <p:nvSpPr>
@@ -3296,6 +3492,13 @@
           </a:solidFill>
           <a:ln/>
         </p:spPr>
+        <p:txBody>
+          <a:bodyPr/>
+          <a:lstStyle/>
+          <a:p>
+            <a:endParaRPr lang="en-DE"/>
+          </a:p>
+        </p:txBody>
       </p:sp>
       <p:sp>
         <p:nvSpPr>
@@ -3433,6 +3636,13 @@
           </a:solidFill>
           <a:ln/>
         </p:spPr>
+        <p:txBody>
+          <a:bodyPr/>
+          <a:lstStyle/>
+          <a:p>
+            <a:endParaRPr lang="en-DE"/>
+          </a:p>
+        </p:txBody>
       </p:sp>
       <p:sp>
         <p:nvSpPr>
@@ -3586,6 +3796,13 @@
           </a:solidFill>
           <a:ln/>
         </p:spPr>
+        <p:txBody>
+          <a:bodyPr/>
+          <a:lstStyle/>
+          <a:p>
+            <a:endParaRPr lang="en-DE"/>
+          </a:p>
+        </p:txBody>
       </p:sp>
       <p:sp>
         <p:nvSpPr>
@@ -3606,6 +3823,13 @@
           </a:solidFill>
           <a:ln/>
         </p:spPr>
+        <p:txBody>
+          <a:bodyPr/>
+          <a:lstStyle/>
+          <a:p>
+            <a:endParaRPr lang="en-DE"/>
+          </a:p>
+        </p:txBody>
       </p:sp>
       <p:sp>
         <p:nvSpPr>
@@ -3860,6 +4084,13 @@
           </a:solidFill>
           <a:ln/>
         </p:spPr>
+        <p:txBody>
+          <a:bodyPr/>
+          <a:lstStyle/>
+          <a:p>
+            <a:endParaRPr lang="en-DE"/>
+          </a:p>
+        </p:txBody>
       </p:sp>
       <p:pic>
         <p:nvPicPr>
@@ -3982,6 +4213,13 @@
           </a:solidFill>
           <a:ln/>
         </p:spPr>
+        <p:txBody>
+          <a:bodyPr/>
+          <a:lstStyle/>
+          <a:p>
+            <a:endParaRPr lang="en-DE"/>
+          </a:p>
+        </p:txBody>
       </p:sp>
       <p:pic>
         <p:nvPicPr>
@@ -4104,6 +4342,13 @@
           </a:solidFill>
           <a:ln/>
         </p:spPr>
+        <p:txBody>
+          <a:bodyPr/>
+          <a:lstStyle/>
+          <a:p>
+            <a:endParaRPr lang="en-DE"/>
+          </a:p>
+        </p:txBody>
       </p:sp>
       <p:pic>
         <p:nvPicPr>
@@ -4226,6 +4471,13 @@
           </a:solidFill>
           <a:ln/>
         </p:spPr>
+        <p:txBody>
+          <a:bodyPr/>
+          <a:lstStyle/>
+          <a:p>
+            <a:endParaRPr lang="en-DE"/>
+          </a:p>
+        </p:txBody>
       </p:sp>
       <p:pic>
         <p:nvPicPr>
@@ -4348,6 +4600,13 @@
           </a:solidFill>
           <a:ln/>
         </p:spPr>
+        <p:txBody>
+          <a:bodyPr/>
+          <a:lstStyle/>
+          <a:p>
+            <a:endParaRPr lang="en-DE"/>
+          </a:p>
+        </p:txBody>
       </p:sp>
       <p:pic>
         <p:nvPicPr>
@@ -4482,6 +4741,13 @@
             </a:outerShdw>
           </a:effectLst>
         </p:spPr>
+        <p:txBody>
+          <a:bodyPr/>
+          <a:lstStyle/>
+          <a:p>
+            <a:endParaRPr lang="en-DE"/>
+          </a:p>
+        </p:txBody>
       </p:sp>
       <p:sp>
         <p:nvSpPr>
@@ -4502,6 +4768,13 @@
           </a:solidFill>
           <a:ln/>
         </p:spPr>
+        <p:txBody>
+          <a:bodyPr/>
+          <a:lstStyle/>
+          <a:p>
+            <a:endParaRPr lang="en-DE"/>
+          </a:p>
+        </p:txBody>
       </p:sp>
       <p:sp>
         <p:nvSpPr>
@@ -4522,6 +4795,13 @@
           </a:solidFill>
           <a:ln/>
         </p:spPr>
+        <p:txBody>
+          <a:bodyPr/>
+          <a:lstStyle/>
+          <a:p>
+            <a:endParaRPr lang="en-DE"/>
+          </a:p>
+        </p:txBody>
       </p:sp>
       <p:pic>
         <p:nvPicPr>
@@ -4605,6 +4885,13 @@
           </a:solidFill>
           <a:ln/>
         </p:spPr>
+        <p:txBody>
+          <a:bodyPr/>
+          <a:lstStyle/>
+          <a:p>
+            <a:endParaRPr lang="en-DE"/>
+          </a:p>
+        </p:txBody>
       </p:sp>
       <p:sp>
         <p:nvSpPr>
@@ -4884,6 +5171,13 @@
           </a:solidFill>
           <a:ln/>
         </p:spPr>
+        <p:txBody>
+          <a:bodyPr/>
+          <a:lstStyle/>
+          <a:p>
+            <a:endParaRPr lang="en-DE"/>
+          </a:p>
+        </p:txBody>
       </p:sp>
       <p:sp>
         <p:nvSpPr>
@@ -4904,6 +5198,13 @@
           </a:solidFill>
           <a:ln/>
         </p:spPr>
+        <p:txBody>
+          <a:bodyPr/>
+          <a:lstStyle/>
+          <a:p>
+            <a:endParaRPr lang="en-DE"/>
+          </a:p>
+        </p:txBody>
       </p:sp>
       <p:sp>
         <p:nvSpPr>
@@ -5131,6 +5432,13 @@
             </a:outerShdw>
           </a:effectLst>
         </p:spPr>
+        <p:txBody>
+          <a:bodyPr/>
+          <a:lstStyle/>
+          <a:p>
+            <a:endParaRPr lang="en-DE"/>
+          </a:p>
+        </p:txBody>
       </p:sp>
       <p:sp>
         <p:nvSpPr>
@@ -5241,6 +5549,13 @@
             </a:outerShdw>
           </a:effectLst>
         </p:spPr>
+        <p:txBody>
+          <a:bodyPr/>
+          <a:lstStyle/>
+          <a:p>
+            <a:endParaRPr lang="en-DE"/>
+          </a:p>
+        </p:txBody>
       </p:sp>
       <p:sp>
         <p:nvSpPr>
@@ -5351,6 +5666,13 @@
             </a:outerShdw>
           </a:effectLst>
         </p:spPr>
+        <p:txBody>
+          <a:bodyPr/>
+          <a:lstStyle/>
+          <a:p>
+            <a:endParaRPr lang="en-DE"/>
+          </a:p>
+        </p:txBody>
       </p:sp>
       <p:sp>
         <p:nvSpPr>
@@ -5454,6 +5776,13 @@
             <a:prstDash val="solid"/>
           </a:ln>
         </p:spPr>
+        <p:txBody>
+          <a:bodyPr/>
+          <a:lstStyle/>
+          <a:p>
+            <a:endParaRPr lang="en-DE"/>
+          </a:p>
+        </p:txBody>
       </p:sp>
       <p:sp>
         <p:nvSpPr>
@@ -5474,6 +5803,13 @@
           </a:solidFill>
           <a:ln/>
         </p:spPr>
+        <p:txBody>
+          <a:bodyPr/>
+          <a:lstStyle/>
+          <a:p>
+            <a:endParaRPr lang="en-DE"/>
+          </a:p>
+        </p:txBody>
       </p:sp>
       <p:pic>
         <p:nvPicPr>
@@ -5601,6 +5937,13 @@
             <a:prstDash val="solid"/>
           </a:ln>
         </p:spPr>
+        <p:txBody>
+          <a:bodyPr/>
+          <a:lstStyle/>
+          <a:p>
+            <a:endParaRPr lang="en-DE"/>
+          </a:p>
+        </p:txBody>
       </p:sp>
       <p:sp>
         <p:nvSpPr>
@@ -5621,6 +5964,13 @@
           </a:solidFill>
           <a:ln/>
         </p:spPr>
+        <p:txBody>
+          <a:bodyPr/>
+          <a:lstStyle/>
+          <a:p>
+            <a:endParaRPr lang="en-DE"/>
+          </a:p>
+        </p:txBody>
       </p:sp>
       <p:pic>
         <p:nvPicPr>
@@ -5748,6 +6098,13 @@
             <a:prstDash val="solid"/>
           </a:ln>
         </p:spPr>
+        <p:txBody>
+          <a:bodyPr/>
+          <a:lstStyle/>
+          <a:p>
+            <a:endParaRPr lang="en-DE"/>
+          </a:p>
+        </p:txBody>
       </p:sp>
       <p:sp>
         <p:nvSpPr>
@@ -5768,6 +6125,13 @@
           </a:solidFill>
           <a:ln/>
         </p:spPr>
+        <p:txBody>
+          <a:bodyPr/>
+          <a:lstStyle/>
+          <a:p>
+            <a:endParaRPr lang="en-DE"/>
+          </a:p>
+        </p:txBody>
       </p:sp>
       <p:pic>
         <p:nvPicPr>
@@ -5895,6 +6259,13 @@
             <a:prstDash val="solid"/>
           </a:ln>
         </p:spPr>
+        <p:txBody>
+          <a:bodyPr/>
+          <a:lstStyle/>
+          <a:p>
+            <a:endParaRPr lang="en-DE"/>
+          </a:p>
+        </p:txBody>
       </p:sp>
       <p:sp>
         <p:nvSpPr>
@@ -5915,6 +6286,13 @@
           </a:solidFill>
           <a:ln/>
         </p:spPr>
+        <p:txBody>
+          <a:bodyPr/>
+          <a:lstStyle/>
+          <a:p>
+            <a:endParaRPr lang="en-DE"/>
+          </a:p>
+        </p:txBody>
       </p:sp>
       <p:pic>
         <p:nvPicPr>
@@ -6042,6 +6420,13 @@
             <a:prstDash val="solid"/>
           </a:ln>
         </p:spPr>
+        <p:txBody>
+          <a:bodyPr/>
+          <a:lstStyle/>
+          <a:p>
+            <a:endParaRPr lang="en-DE"/>
+          </a:p>
+        </p:txBody>
       </p:sp>
       <p:sp>
         <p:nvSpPr>
@@ -6062,6 +6447,13 @@
           </a:solidFill>
           <a:ln/>
         </p:spPr>
+        <p:txBody>
+          <a:bodyPr/>
+          <a:lstStyle/>
+          <a:p>
+            <a:endParaRPr lang="en-DE"/>
+          </a:p>
+        </p:txBody>
       </p:sp>
       <p:pic>
         <p:nvPicPr>
@@ -6217,6 +6609,13 @@
           </a:solidFill>
           <a:ln/>
         </p:spPr>
+        <p:txBody>
+          <a:bodyPr/>
+          <a:lstStyle/>
+          <a:p>
+            <a:endParaRPr lang="en-DE"/>
+          </a:p>
+        </p:txBody>
       </p:sp>
       <p:sp>
         <p:nvSpPr>
@@ -6237,6 +6636,13 @@
           </a:solidFill>
           <a:ln/>
         </p:spPr>
+        <p:txBody>
+          <a:bodyPr/>
+          <a:lstStyle/>
+          <a:p>
+            <a:endParaRPr lang="en-DE"/>
+          </a:p>
+        </p:txBody>
       </p:sp>
       <p:sp>
         <p:nvSpPr>
@@ -6459,6 +6865,13 @@
             </a:outerShdw>
           </a:effectLst>
         </p:spPr>
+        <p:txBody>
+          <a:bodyPr/>
+          <a:lstStyle/>
+          <a:p>
+            <a:endParaRPr lang="en-DE"/>
+          </a:p>
+        </p:txBody>
       </p:sp>
       <p:sp>
         <p:nvSpPr>
@@ -6608,6 +7021,13 @@
             </a:outerShdw>
           </a:effectLst>
         </p:spPr>
+        <p:txBody>
+          <a:bodyPr/>
+          <a:lstStyle/>
+          <a:p>
+            <a:endParaRPr lang="en-DE"/>
+          </a:p>
+        </p:txBody>
       </p:sp>
       <p:sp>
         <p:nvSpPr>
@@ -6628,6 +7048,13 @@
           </a:solidFill>
           <a:ln/>
         </p:spPr>
+        <p:txBody>
+          <a:bodyPr/>
+          <a:lstStyle/>
+          <a:p>
+            <a:endParaRPr lang="en-DE"/>
+          </a:p>
+        </p:txBody>
       </p:sp>
       <p:pic>
         <p:nvPicPr>
@@ -6837,6 +7264,13 @@
             <a:prstDash val="solid"/>
           </a:ln>
         </p:spPr>
+        <p:txBody>
+          <a:bodyPr/>
+          <a:lstStyle/>
+          <a:p>
+            <a:endParaRPr lang="en-DE"/>
+          </a:p>
+        </p:txBody>
       </p:sp>
       <p:sp>
         <p:nvSpPr>
@@ -6857,6 +7291,13 @@
           </a:solidFill>
           <a:ln/>
         </p:spPr>
+        <p:txBody>
+          <a:bodyPr/>
+          <a:lstStyle/>
+          <a:p>
+            <a:endParaRPr lang="en-DE"/>
+          </a:p>
+        </p:txBody>
       </p:sp>
       <p:sp>
         <p:nvSpPr>
@@ -6877,6 +7318,13 @@
           </a:solidFill>
           <a:ln/>
         </p:spPr>
+        <p:txBody>
+          <a:bodyPr/>
+          <a:lstStyle/>
+          <a:p>
+            <a:endParaRPr lang="en-DE"/>
+          </a:p>
+        </p:txBody>
       </p:sp>
       <p:pic>
         <p:nvPicPr>
@@ -7004,6 +7452,13 @@
             <a:prstDash val="solid"/>
           </a:ln>
         </p:spPr>
+        <p:txBody>
+          <a:bodyPr/>
+          <a:lstStyle/>
+          <a:p>
+            <a:endParaRPr lang="en-DE"/>
+          </a:p>
+        </p:txBody>
       </p:sp>
       <p:sp>
         <p:nvSpPr>
@@ -7024,6 +7479,13 @@
           </a:solidFill>
           <a:ln/>
         </p:spPr>
+        <p:txBody>
+          <a:bodyPr/>
+          <a:lstStyle/>
+          <a:p>
+            <a:endParaRPr lang="en-DE"/>
+          </a:p>
+        </p:txBody>
       </p:sp>
       <p:sp>
         <p:nvSpPr>
@@ -7044,6 +7506,13 @@
           </a:solidFill>
           <a:ln/>
         </p:spPr>
+        <p:txBody>
+          <a:bodyPr/>
+          <a:lstStyle/>
+          <a:p>
+            <a:endParaRPr lang="en-DE"/>
+          </a:p>
+        </p:txBody>
       </p:sp>
       <p:pic>
         <p:nvPicPr>
@@ -7171,6 +7640,13 @@
             <a:prstDash val="solid"/>
           </a:ln>
         </p:spPr>
+        <p:txBody>
+          <a:bodyPr/>
+          <a:lstStyle/>
+          <a:p>
+            <a:endParaRPr lang="en-DE"/>
+          </a:p>
+        </p:txBody>
       </p:sp>
       <p:sp>
         <p:nvSpPr>
@@ -7191,6 +7667,13 @@
           </a:solidFill>
           <a:ln/>
         </p:spPr>
+        <p:txBody>
+          <a:bodyPr/>
+          <a:lstStyle/>
+          <a:p>
+            <a:endParaRPr lang="en-DE"/>
+          </a:p>
+        </p:txBody>
       </p:sp>
       <p:sp>
         <p:nvSpPr>
@@ -7211,6 +7694,13 @@
           </a:solidFill>
           <a:ln/>
         </p:spPr>
+        <p:txBody>
+          <a:bodyPr/>
+          <a:lstStyle/>
+          <a:p>
+            <a:endParaRPr lang="en-DE"/>
+          </a:p>
+        </p:txBody>
       </p:sp>
       <p:pic>
         <p:nvPicPr>
@@ -7338,6 +7828,13 @@
             <a:prstDash val="solid"/>
           </a:ln>
         </p:spPr>
+        <p:txBody>
+          <a:bodyPr/>
+          <a:lstStyle/>
+          <a:p>
+            <a:endParaRPr lang="en-DE"/>
+          </a:p>
+        </p:txBody>
       </p:sp>
       <p:sp>
         <p:nvSpPr>
@@ -7358,6 +7855,13 @@
           </a:solidFill>
           <a:ln/>
         </p:spPr>
+        <p:txBody>
+          <a:bodyPr/>
+          <a:lstStyle/>
+          <a:p>
+            <a:endParaRPr lang="en-DE"/>
+          </a:p>
+        </p:txBody>
       </p:sp>
       <p:sp>
         <p:nvSpPr>
@@ -7378,6 +7882,13 @@
           </a:solidFill>
           <a:ln/>
         </p:spPr>
+        <p:txBody>
+          <a:bodyPr/>
+          <a:lstStyle/>
+          <a:p>
+            <a:endParaRPr lang="en-DE"/>
+          </a:p>
+        </p:txBody>
       </p:sp>
       <p:pic>
         <p:nvPicPr>
@@ -7533,6 +8044,13 @@
           </a:solidFill>
           <a:ln/>
         </p:spPr>
+        <p:txBody>
+          <a:bodyPr/>
+          <a:lstStyle/>
+          <a:p>
+            <a:endParaRPr lang="en-DE"/>
+          </a:p>
+        </p:txBody>
       </p:sp>
       <p:sp>
         <p:nvSpPr>
@@ -7553,6 +8071,13 @@
           </a:solidFill>
           <a:ln/>
         </p:spPr>
+        <p:txBody>
+          <a:bodyPr/>
+          <a:lstStyle/>
+          <a:p>
+            <a:endParaRPr lang="en-DE"/>
+          </a:p>
+        </p:txBody>
       </p:sp>
       <p:sp>
         <p:nvSpPr>
@@ -7819,6 +8344,13 @@
             </a:outerShdw>
           </a:effectLst>
         </p:spPr>
+        <p:txBody>
+          <a:bodyPr/>
+          <a:lstStyle/>
+          <a:p>
+            <a:endParaRPr lang="en-DE"/>
+          </a:p>
+        </p:txBody>
       </p:sp>
       <p:sp>
         <p:nvSpPr>
@@ -7839,6 +8371,13 @@
           </a:solidFill>
           <a:ln/>
         </p:spPr>
+        <p:txBody>
+          <a:bodyPr/>
+          <a:lstStyle/>
+          <a:p>
+            <a:endParaRPr lang="en-DE"/>
+          </a:p>
+        </p:txBody>
       </p:sp>
       <p:pic>
         <p:nvPicPr>
@@ -7926,6 +8465,13 @@
             <a:tailEnd type="triangle"/>
           </a:ln>
         </p:spPr>
+        <p:txBody>
+          <a:bodyPr/>
+          <a:lstStyle/>
+          <a:p>
+            <a:endParaRPr lang="en-DE"/>
+          </a:p>
+        </p:txBody>
       </p:sp>
       <p:sp>
         <p:nvSpPr>
@@ -7958,6 +8504,13 @@
             </a:outerShdw>
           </a:effectLst>
         </p:spPr>
+        <p:txBody>
+          <a:bodyPr/>
+          <a:lstStyle/>
+          <a:p>
+            <a:endParaRPr lang="en-DE"/>
+          </a:p>
+        </p:txBody>
       </p:sp>
       <p:sp>
         <p:nvSpPr>
@@ -7978,6 +8531,13 @@
           </a:solidFill>
           <a:ln/>
         </p:spPr>
+        <p:txBody>
+          <a:bodyPr/>
+          <a:lstStyle/>
+          <a:p>
+            <a:endParaRPr lang="en-DE"/>
+          </a:p>
+        </p:txBody>
       </p:sp>
       <p:pic>
         <p:nvPicPr>
@@ -8065,6 +8625,13 @@
             <a:tailEnd type="triangle"/>
           </a:ln>
         </p:spPr>
+        <p:txBody>
+          <a:bodyPr/>
+          <a:lstStyle/>
+          <a:p>
+            <a:endParaRPr lang="en-DE"/>
+          </a:p>
+        </p:txBody>
       </p:sp>
       <p:sp>
         <p:nvSpPr>
@@ -8097,6 +8664,13 @@
             </a:outerShdw>
           </a:effectLst>
         </p:spPr>
+        <p:txBody>
+          <a:bodyPr/>
+          <a:lstStyle/>
+          <a:p>
+            <a:endParaRPr lang="en-DE"/>
+          </a:p>
+        </p:txBody>
       </p:sp>
       <p:sp>
         <p:nvSpPr>
@@ -8117,6 +8691,13 @@
           </a:solidFill>
           <a:ln/>
         </p:spPr>
+        <p:txBody>
+          <a:bodyPr/>
+          <a:lstStyle/>
+          <a:p>
+            <a:endParaRPr lang="en-DE"/>
+          </a:p>
+        </p:txBody>
       </p:sp>
       <p:pic>
         <p:nvPicPr>
@@ -8204,6 +8785,13 @@
             <a:tailEnd type="triangle"/>
           </a:ln>
         </p:spPr>
+        <p:txBody>
+          <a:bodyPr/>
+          <a:lstStyle/>
+          <a:p>
+            <a:endParaRPr lang="en-DE"/>
+          </a:p>
+        </p:txBody>
       </p:sp>
       <p:sp>
         <p:nvSpPr>
@@ -8236,6 +8824,13 @@
             </a:outerShdw>
           </a:effectLst>
         </p:spPr>
+        <p:txBody>
+          <a:bodyPr/>
+          <a:lstStyle/>
+          <a:p>
+            <a:endParaRPr lang="en-DE"/>
+          </a:p>
+        </p:txBody>
       </p:sp>
       <p:sp>
         <p:nvSpPr>
@@ -8256,6 +8851,13 @@
           </a:solidFill>
           <a:ln/>
         </p:spPr>
+        <p:txBody>
+          <a:bodyPr/>
+          <a:lstStyle/>
+          <a:p>
+            <a:endParaRPr lang="en-DE"/>
+          </a:p>
+        </p:txBody>
       </p:sp>
       <p:pic>
         <p:nvPicPr>
@@ -8343,6 +8945,13 @@
             <a:tailEnd type="triangle"/>
           </a:ln>
         </p:spPr>
+        <p:txBody>
+          <a:bodyPr/>
+          <a:lstStyle/>
+          <a:p>
+            <a:endParaRPr lang="en-DE"/>
+          </a:p>
+        </p:txBody>
       </p:sp>
       <p:sp>
         <p:nvSpPr>
@@ -8375,6 +8984,13 @@
             </a:outerShdw>
           </a:effectLst>
         </p:spPr>
+        <p:txBody>
+          <a:bodyPr/>
+          <a:lstStyle/>
+          <a:p>
+            <a:endParaRPr lang="en-DE"/>
+          </a:p>
+        </p:txBody>
       </p:sp>
       <p:sp>
         <p:nvSpPr>
@@ -8395,6 +9011,13 @@
           </a:solidFill>
           <a:ln/>
         </p:spPr>
+        <p:txBody>
+          <a:bodyPr/>
+          <a:lstStyle/>
+          <a:p>
+            <a:endParaRPr lang="en-DE"/>
+          </a:p>
+        </p:txBody>
       </p:sp>
       <p:pic>
         <p:nvPicPr>
@@ -8490,6 +9113,13 @@
             </a:outerShdw>
           </a:effectLst>
         </p:spPr>
+        <p:txBody>
+          <a:bodyPr/>
+          <a:lstStyle/>
+          <a:p>
+            <a:endParaRPr lang="en-DE"/>
+          </a:p>
+        </p:txBody>
       </p:sp>
       <p:sp>
         <p:nvSpPr>
@@ -8510,6 +9140,13 @@
           </a:solidFill>
           <a:ln/>
         </p:spPr>
+        <p:txBody>
+          <a:bodyPr/>
+          <a:lstStyle/>
+          <a:p>
+            <a:endParaRPr lang="en-DE"/>
+          </a:p>
+        </p:txBody>
       </p:sp>
       <p:sp>
         <p:nvSpPr>
@@ -8530,6 +9167,13 @@
           </a:solidFill>
           <a:ln/>
         </p:spPr>
+        <p:txBody>
+          <a:bodyPr/>
+          <a:lstStyle/>
+          <a:p>
+            <a:endParaRPr lang="en-DE"/>
+          </a:p>
+        </p:txBody>
       </p:sp>
       <p:pic>
         <p:nvPicPr>
@@ -8731,6 +9375,13 @@
             </a:outerShdw>
           </a:effectLst>
         </p:spPr>
+        <p:txBody>
+          <a:bodyPr/>
+          <a:lstStyle/>
+          <a:p>
+            <a:endParaRPr lang="en-DE"/>
+          </a:p>
+        </p:txBody>
       </p:sp>
       <p:sp>
         <p:nvSpPr>
@@ -8751,6 +9402,13 @@
           </a:solidFill>
           <a:ln/>
         </p:spPr>
+        <p:txBody>
+          <a:bodyPr/>
+          <a:lstStyle/>
+          <a:p>
+            <a:endParaRPr lang="en-DE"/>
+          </a:p>
+        </p:txBody>
       </p:sp>
       <p:sp>
         <p:nvSpPr>
@@ -8771,6 +9429,13 @@
           </a:solidFill>
           <a:ln/>
         </p:spPr>
+        <p:txBody>
+          <a:bodyPr/>
+          <a:lstStyle/>
+          <a:p>
+            <a:endParaRPr lang="en-DE"/>
+          </a:p>
+        </p:txBody>
       </p:sp>
       <p:pic>
         <p:nvPicPr>
@@ -8993,6 +9658,13 @@
           </a:solidFill>
           <a:ln/>
         </p:spPr>
+        <p:txBody>
+          <a:bodyPr/>
+          <a:lstStyle/>
+          <a:p>
+            <a:endParaRPr lang="en-DE"/>
+          </a:p>
+        </p:txBody>
       </p:sp>
       <p:sp>
         <p:nvSpPr>
@@ -9013,6 +9685,13 @@
           </a:solidFill>
           <a:ln/>
         </p:spPr>
+        <p:txBody>
+          <a:bodyPr/>
+          <a:lstStyle/>
+          <a:p>
+            <a:endParaRPr lang="en-DE"/>
+          </a:p>
+        </p:txBody>
       </p:sp>
       <p:sp>
         <p:nvSpPr>
@@ -9287,7 +9966,13 @@
         <p:nvGraphicFramePr>
           <p:cNvPr id="10" name="Chart 0"/>
           <p:cNvGraphicFramePr/>
-          <p:nvPr/>
+          <p:nvPr>
+            <p:extLst>
+              <p:ext uri="{D42A27DB-BD31-4B8C-83A1-F6EECF244321}">
+                <p14:modId xmlns:p14="http://schemas.microsoft.com/office/powerpoint/2010/main" val="3888655809"/>
+              </p:ext>
+            </p:extLst>
+          </p:nvPr>
         </p:nvGraphicFramePr>
         <p:xfrm>
           <a:off x="457200" y="1965960"/>
@@ -9330,6 +10015,13 @@
             </a:outerShdw>
           </a:effectLst>
         </p:spPr>
+        <p:txBody>
+          <a:bodyPr/>
+          <a:lstStyle/>
+          <a:p>
+            <a:endParaRPr lang="en-DE" dirty="0"/>
+          </a:p>
+        </p:txBody>
       </p:sp>
       <p:sp>
         <p:nvSpPr>
@@ -9350,6 +10042,13 @@
           </a:solidFill>
           <a:ln/>
         </p:spPr>
+        <p:txBody>
+          <a:bodyPr/>
+          <a:lstStyle/>
+          <a:p>
+            <a:endParaRPr lang="en-DE"/>
+          </a:p>
+        </p:txBody>
       </p:sp>
       <p:pic>
         <p:nvPicPr>
@@ -9472,7 +10171,29 @@
                 <a:ea typeface="Calibri" pitchFamily="34" charset="-122"/>
                 <a:cs typeface="Calibri" pitchFamily="34" charset="-120"/>
               </a:rPr>
-              <a:t>41 Commits · 4 Teammitglieder · Git-Branching</a:t>
+              <a:t>38 Commits (</a:t>
+            </a:r>
+            <a:r>
+              <a:rPr lang="en-US" sz="1200" dirty="0" err="1">
+                <a:solidFill>
+                  <a:srgbClr val="2A2D34"/>
+                </a:solidFill>
+                <a:latin typeface="Calibri" pitchFamily="34" charset="0"/>
+                <a:ea typeface="Calibri" pitchFamily="34" charset="-122"/>
+                <a:cs typeface="Calibri" pitchFamily="34" charset="-120"/>
+              </a:rPr>
+              <a:t>angepasst</a:t>
+            </a:r>
+            <a:r>
+              <a:rPr lang="en-US" sz="1200" dirty="0">
+                <a:solidFill>
+                  <a:srgbClr val="2A2D34"/>
+                </a:solidFill>
+                <a:latin typeface="Calibri" pitchFamily="34" charset="0"/>
+                <a:ea typeface="Calibri" pitchFamily="34" charset="-122"/>
+                <a:cs typeface="Calibri" pitchFamily="34" charset="-120"/>
+              </a:rPr>
+              <a:t>) · 4 Teammitglieder · Git-Branching</a:t>
             </a:r>
             <a:endParaRPr lang="en-US" sz="1200" dirty="0"/>
           </a:p>
@@ -9543,6 +10264,13 @@
             </a:outerShdw>
           </a:effectLst>
         </p:spPr>
+        <p:txBody>
+          <a:bodyPr/>
+          <a:lstStyle/>
+          <a:p>
+            <a:endParaRPr lang="en-DE"/>
+          </a:p>
+        </p:txBody>
       </p:sp>
       <p:sp>
         <p:nvSpPr>
@@ -9563,6 +10291,13 @@
           </a:solidFill>
           <a:ln/>
         </p:spPr>
+        <p:txBody>
+          <a:bodyPr/>
+          <a:lstStyle/>
+          <a:p>
+            <a:endParaRPr lang="en-DE"/>
+          </a:p>
+        </p:txBody>
       </p:sp>
       <p:pic>
         <p:nvPicPr>
@@ -9800,6 +10535,13 @@
           </a:solidFill>
           <a:ln/>
         </p:spPr>
+        <p:txBody>
+          <a:bodyPr/>
+          <a:lstStyle/>
+          <a:p>
+            <a:endParaRPr lang="en-DE"/>
+          </a:p>
+        </p:txBody>
       </p:sp>
       <p:sp>
         <p:nvSpPr>
@@ -9820,6 +10562,13 @@
           </a:solidFill>
           <a:ln/>
         </p:spPr>
+        <p:txBody>
+          <a:bodyPr/>
+          <a:lstStyle/>
+          <a:p>
+            <a:endParaRPr lang="en-DE"/>
+          </a:p>
+        </p:txBody>
       </p:sp>
       <p:sp>
         <p:nvSpPr>
@@ -10035,6 +10784,13 @@
           </a:solidFill>
           <a:ln/>
         </p:spPr>
+        <p:txBody>
+          <a:bodyPr/>
+          <a:lstStyle/>
+          <a:p>
+            <a:endParaRPr lang="en-DE"/>
+          </a:p>
+        </p:txBody>
       </p:sp>
       <p:sp>
         <p:nvSpPr>
@@ -10055,6 +10811,13 @@
           </a:solidFill>
           <a:ln/>
         </p:spPr>
+        <p:txBody>
+          <a:bodyPr/>
+          <a:lstStyle/>
+          <a:p>
+            <a:endParaRPr lang="en-DE"/>
+          </a:p>
+        </p:txBody>
       </p:sp>
       <p:pic>
         <p:nvPicPr>
@@ -10177,6 +10940,13 @@
           </a:solidFill>
           <a:ln/>
         </p:spPr>
+        <p:txBody>
+          <a:bodyPr/>
+          <a:lstStyle/>
+          <a:p>
+            <a:endParaRPr lang="en-DE"/>
+          </a:p>
+        </p:txBody>
       </p:sp>
       <p:pic>
         <p:nvPicPr>
@@ -10299,6 +11069,13 @@
           </a:solidFill>
           <a:ln/>
         </p:spPr>
+        <p:txBody>
+          <a:bodyPr/>
+          <a:lstStyle/>
+          <a:p>
+            <a:endParaRPr lang="en-DE"/>
+          </a:p>
+        </p:txBody>
       </p:sp>
       <p:pic>
         <p:nvPicPr>
@@ -10421,6 +11198,13 @@
           </a:solidFill>
           <a:ln/>
         </p:spPr>
+        <p:txBody>
+          <a:bodyPr/>
+          <a:lstStyle/>
+          <a:p>
+            <a:endParaRPr lang="en-DE"/>
+          </a:p>
+        </p:txBody>
       </p:sp>
       <p:pic>
         <p:nvPicPr>
@@ -10543,6 +11327,13 @@
           </a:solidFill>
           <a:ln/>
         </p:spPr>
+        <p:txBody>
+          <a:bodyPr/>
+          <a:lstStyle/>
+          <a:p>
+            <a:endParaRPr lang="en-DE"/>
+          </a:p>
+        </p:txBody>
       </p:sp>
       <p:pic>
         <p:nvPicPr>
@@ -10665,6 +11456,13 @@
           </a:solidFill>
           <a:ln/>
         </p:spPr>
+        <p:txBody>
+          <a:bodyPr/>
+          <a:lstStyle/>
+          <a:p>
+            <a:endParaRPr lang="en-DE"/>
+          </a:p>
+        </p:txBody>
       </p:sp>
       <p:pic>
         <p:nvPicPr>
@@ -10820,6 +11618,13 @@
           </a:solidFill>
           <a:ln/>
         </p:spPr>
+        <p:txBody>
+          <a:bodyPr/>
+          <a:lstStyle/>
+          <a:p>
+            <a:endParaRPr lang="en-DE"/>
+          </a:p>
+        </p:txBody>
       </p:sp>
       <p:sp>
         <p:nvSpPr>
@@ -10843,6 +11648,13 @@
             <a:prstDash val="solid"/>
           </a:ln>
         </p:spPr>
+        <p:txBody>
+          <a:bodyPr/>
+          <a:lstStyle/>
+          <a:p>
+            <a:endParaRPr lang="en-DE"/>
+          </a:p>
+        </p:txBody>
       </p:sp>
       <p:sp>
         <p:nvSpPr>
@@ -10866,6 +11678,13 @@
             <a:prstDash val="solid"/>
           </a:ln>
         </p:spPr>
+        <p:txBody>
+          <a:bodyPr/>
+          <a:lstStyle/>
+          <a:p>
+            <a:endParaRPr lang="en-DE"/>
+          </a:p>
+        </p:txBody>
       </p:sp>
       <p:sp>
         <p:nvSpPr>
@@ -10889,6 +11708,13 @@
             <a:prstDash val="solid"/>
           </a:ln>
         </p:spPr>
+        <p:txBody>
+          <a:bodyPr/>
+          <a:lstStyle/>
+          <a:p>
+            <a:endParaRPr lang="en-DE"/>
+          </a:p>
+        </p:txBody>
       </p:sp>
       <p:sp>
         <p:nvSpPr>
@@ -10912,6 +11738,13 @@
             <a:prstDash val="solid"/>
           </a:ln>
         </p:spPr>
+        <p:txBody>
+          <a:bodyPr/>
+          <a:lstStyle/>
+          <a:p>
+            <a:endParaRPr lang="en-DE"/>
+          </a:p>
+        </p:txBody>
       </p:sp>
       <p:sp>
         <p:nvSpPr>
@@ -10935,6 +11768,13 @@
             <a:prstDash val="solid"/>
           </a:ln>
         </p:spPr>
+        <p:txBody>
+          <a:bodyPr/>
+          <a:lstStyle/>
+          <a:p>
+            <a:endParaRPr lang="en-DE"/>
+          </a:p>
+        </p:txBody>
       </p:sp>
       <p:sp>
         <p:nvSpPr>
@@ -10958,6 +11798,13 @@
             <a:prstDash val="solid"/>
           </a:ln>
         </p:spPr>
+        <p:txBody>
+          <a:bodyPr/>
+          <a:lstStyle/>
+          <a:p>
+            <a:endParaRPr lang="en-DE"/>
+          </a:p>
+        </p:txBody>
       </p:sp>
       <p:sp>
         <p:nvSpPr>
@@ -10981,6 +11828,13 @@
             <a:prstDash val="solid"/>
           </a:ln>
         </p:spPr>
+        <p:txBody>
+          <a:bodyPr/>
+          <a:lstStyle/>
+          <a:p>
+            <a:endParaRPr lang="en-DE"/>
+          </a:p>
+        </p:txBody>
       </p:sp>
       <p:sp>
         <p:nvSpPr>
@@ -11001,6 +11855,13 @@
           </a:solidFill>
           <a:ln/>
         </p:spPr>
+        <p:txBody>
+          <a:bodyPr/>
+          <a:lstStyle/>
+          <a:p>
+            <a:endParaRPr lang="en-DE"/>
+          </a:p>
+        </p:txBody>
       </p:sp>
       <p:sp>
         <p:nvSpPr>
@@ -11021,6 +11882,13 @@
           </a:solidFill>
           <a:ln/>
         </p:spPr>
+        <p:txBody>
+          <a:bodyPr/>
+          <a:lstStyle/>
+          <a:p>
+            <a:endParaRPr lang="en-DE"/>
+          </a:p>
+        </p:txBody>
       </p:sp>
       <p:sp>
         <p:nvSpPr>
@@ -11041,6 +11909,13 @@
           </a:solidFill>
           <a:ln/>
         </p:spPr>
+        <p:txBody>
+          <a:bodyPr/>
+          <a:lstStyle/>
+          <a:p>
+            <a:endParaRPr lang="en-DE"/>
+          </a:p>
+        </p:txBody>
       </p:sp>
       <p:sp>
         <p:nvSpPr>
@@ -11061,6 +11936,13 @@
           </a:solidFill>
           <a:ln/>
         </p:spPr>
+        <p:txBody>
+          <a:bodyPr/>
+          <a:lstStyle/>
+          <a:p>
+            <a:endParaRPr lang="en-DE"/>
+          </a:p>
+        </p:txBody>
       </p:sp>
       <p:sp>
         <p:nvSpPr>
@@ -11081,6 +11963,13 @@
           </a:solidFill>
           <a:ln/>
         </p:spPr>
+        <p:txBody>
+          <a:bodyPr/>
+          <a:lstStyle/>
+          <a:p>
+            <a:endParaRPr lang="en-DE"/>
+          </a:p>
+        </p:txBody>
       </p:sp>
       <p:sp>
         <p:nvSpPr>
@@ -11101,6 +11990,13 @@
           </a:solidFill>
           <a:ln/>
         </p:spPr>
+        <p:txBody>
+          <a:bodyPr/>
+          <a:lstStyle/>
+          <a:p>
+            <a:endParaRPr lang="en-DE"/>
+          </a:p>
+        </p:txBody>
       </p:sp>
       <p:sp>
         <p:nvSpPr>
@@ -11124,6 +12020,13 @@
             <a:prstDash val="solid"/>
           </a:ln>
         </p:spPr>
+        <p:txBody>
+          <a:bodyPr/>
+          <a:lstStyle/>
+          <a:p>
+            <a:endParaRPr lang="en-DE"/>
+          </a:p>
+        </p:txBody>
       </p:sp>
       <p:sp>
         <p:nvSpPr>
@@ -11147,6 +12050,13 @@
             <a:prstDash val="solid"/>
           </a:ln>
         </p:spPr>
+        <p:txBody>
+          <a:bodyPr/>
+          <a:lstStyle/>
+          <a:p>
+            <a:endParaRPr lang="en-DE"/>
+          </a:p>
+        </p:txBody>
       </p:sp>
       <p:sp>
         <p:nvSpPr>
@@ -11170,6 +12080,13 @@
             <a:prstDash val="solid"/>
           </a:ln>
         </p:spPr>
+        <p:txBody>
+          <a:bodyPr/>
+          <a:lstStyle/>
+          <a:p>
+            <a:endParaRPr lang="en-DE"/>
+          </a:p>
+        </p:txBody>
       </p:sp>
       <p:sp>
         <p:nvSpPr>
@@ -11193,6 +12110,13 @@
             <a:prstDash val="solid"/>
           </a:ln>
         </p:spPr>
+        <p:txBody>
+          <a:bodyPr/>
+          <a:lstStyle/>
+          <a:p>
+            <a:endParaRPr lang="en-DE"/>
+          </a:p>
+        </p:txBody>
       </p:sp>
       <p:sp>
         <p:nvSpPr>
@@ -11216,6 +12140,13 @@
             <a:prstDash val="solid"/>
           </a:ln>
         </p:spPr>
+        <p:txBody>
+          <a:bodyPr/>
+          <a:lstStyle/>
+          <a:p>
+            <a:endParaRPr lang="en-DE"/>
+          </a:p>
+        </p:txBody>
       </p:sp>
       <p:sp>
         <p:nvSpPr>
@@ -11239,6 +12170,13 @@
             <a:prstDash val="solid"/>
           </a:ln>
         </p:spPr>
+        <p:txBody>
+          <a:bodyPr/>
+          <a:lstStyle/>
+          <a:p>
+            <a:endParaRPr lang="en-DE"/>
+          </a:p>
+        </p:txBody>
       </p:sp>
       <p:sp>
         <p:nvSpPr>
@@ -11262,6 +12200,13 @@
             <a:prstDash val="solid"/>
           </a:ln>
         </p:spPr>
+        <p:txBody>
+          <a:bodyPr/>
+          <a:lstStyle/>
+          <a:p>
+            <a:endParaRPr lang="en-DE"/>
+          </a:p>
+        </p:txBody>
       </p:sp>
       <p:sp>
         <p:nvSpPr>
@@ -11282,6 +12227,13 @@
           </a:solidFill>
           <a:ln/>
         </p:spPr>
+        <p:txBody>
+          <a:bodyPr/>
+          <a:lstStyle/>
+          <a:p>
+            <a:endParaRPr lang="en-DE"/>
+          </a:p>
+        </p:txBody>
       </p:sp>
       <p:sp>
         <p:nvSpPr>
@@ -11302,6 +12254,13 @@
           </a:solidFill>
           <a:ln/>
         </p:spPr>
+        <p:txBody>
+          <a:bodyPr/>
+          <a:lstStyle/>
+          <a:p>
+            <a:endParaRPr lang="en-DE"/>
+          </a:p>
+        </p:txBody>
       </p:sp>
       <p:sp>
         <p:nvSpPr>
@@ -11322,6 +12281,13 @@
           </a:solidFill>
           <a:ln/>
         </p:spPr>
+        <p:txBody>
+          <a:bodyPr/>
+          <a:lstStyle/>
+          <a:p>
+            <a:endParaRPr lang="en-DE"/>
+          </a:p>
+        </p:txBody>
       </p:sp>
       <p:sp>
         <p:nvSpPr>
@@ -11342,6 +12308,13 @@
           </a:solidFill>
           <a:ln/>
         </p:spPr>
+        <p:txBody>
+          <a:bodyPr/>
+          <a:lstStyle/>
+          <a:p>
+            <a:endParaRPr lang="en-DE"/>
+          </a:p>
+        </p:txBody>
       </p:sp>
       <p:sp>
         <p:nvSpPr>
@@ -11362,6 +12335,13 @@
           </a:solidFill>
           <a:ln/>
         </p:spPr>
+        <p:txBody>
+          <a:bodyPr/>
+          <a:lstStyle/>
+          <a:p>
+            <a:endParaRPr lang="en-DE"/>
+          </a:p>
+        </p:txBody>
       </p:sp>
       <p:sp>
         <p:nvSpPr>
@@ -11382,6 +12362,13 @@
           </a:solidFill>
           <a:ln/>
         </p:spPr>
+        <p:txBody>
+          <a:bodyPr/>
+          <a:lstStyle/>
+          <a:p>
+            <a:endParaRPr lang="en-DE"/>
+          </a:p>
+        </p:txBody>
       </p:sp>
       <p:sp>
         <p:nvSpPr>
@@ -11480,6 +12467,13 @@
           </a:solidFill>
           <a:ln/>
         </p:spPr>
+        <p:txBody>
+          <a:bodyPr/>
+          <a:lstStyle/>
+          <a:p>
+            <a:endParaRPr lang="en-DE"/>
+          </a:p>
+        </p:txBody>
       </p:sp>
       <p:sp>
         <p:nvSpPr>
@@ -11572,6 +12566,13 @@
           </a:solidFill>
           <a:ln/>
         </p:spPr>
+        <p:txBody>
+          <a:bodyPr/>
+          <a:lstStyle/>
+          <a:p>
+            <a:endParaRPr lang="en-DE"/>
+          </a:p>
+        </p:txBody>
       </p:sp>
       <p:sp>
         <p:nvSpPr>
@@ -11592,6 +12593,13 @@
           </a:solidFill>
           <a:ln/>
         </p:spPr>
+        <p:txBody>
+          <a:bodyPr/>
+          <a:lstStyle/>
+          <a:p>
+            <a:endParaRPr lang="en-DE"/>
+          </a:p>
+        </p:txBody>
       </p:sp>
       <p:sp>
         <p:nvSpPr>
@@ -11819,6 +12827,13 @@
             </a:outerShdw>
           </a:effectLst>
         </p:spPr>
+        <p:txBody>
+          <a:bodyPr/>
+          <a:lstStyle/>
+          <a:p>
+            <a:endParaRPr lang="en-DE"/>
+          </a:p>
+        </p:txBody>
       </p:sp>
       <p:sp>
         <p:nvSpPr>
@@ -11839,6 +12854,13 @@
           </a:solidFill>
           <a:ln/>
         </p:spPr>
+        <p:txBody>
+          <a:bodyPr/>
+          <a:lstStyle/>
+          <a:p>
+            <a:endParaRPr lang="en-DE"/>
+          </a:p>
+        </p:txBody>
       </p:sp>
       <p:sp>
         <p:nvSpPr>
@@ -11859,6 +12881,13 @@
           </a:solidFill>
           <a:ln/>
         </p:spPr>
+        <p:txBody>
+          <a:bodyPr/>
+          <a:lstStyle/>
+          <a:p>
+            <a:endParaRPr lang="en-DE"/>
+          </a:p>
+        </p:txBody>
       </p:sp>
       <p:pic>
         <p:nvPicPr>
@@ -12032,6 +13061,13 @@
             </a:outerShdw>
           </a:effectLst>
         </p:spPr>
+        <p:txBody>
+          <a:bodyPr/>
+          <a:lstStyle/>
+          <a:p>
+            <a:endParaRPr lang="en-DE"/>
+          </a:p>
+        </p:txBody>
       </p:sp>
       <p:sp>
         <p:nvSpPr>
@@ -12052,6 +13088,13 @@
           </a:solidFill>
           <a:ln/>
         </p:spPr>
+        <p:txBody>
+          <a:bodyPr/>
+          <a:lstStyle/>
+          <a:p>
+            <a:endParaRPr lang="en-DE"/>
+          </a:p>
+        </p:txBody>
       </p:sp>
       <p:sp>
         <p:nvSpPr>
@@ -12072,6 +13115,13 @@
           </a:solidFill>
           <a:ln/>
         </p:spPr>
+        <p:txBody>
+          <a:bodyPr/>
+          <a:lstStyle/>
+          <a:p>
+            <a:endParaRPr lang="en-DE"/>
+          </a:p>
+        </p:txBody>
       </p:sp>
       <p:pic>
         <p:nvPicPr>
@@ -12245,6 +13295,13 @@
             </a:outerShdw>
           </a:effectLst>
         </p:spPr>
+        <p:txBody>
+          <a:bodyPr/>
+          <a:lstStyle/>
+          <a:p>
+            <a:endParaRPr lang="en-DE"/>
+          </a:p>
+        </p:txBody>
       </p:sp>
       <p:sp>
         <p:nvSpPr>
@@ -12265,6 +13322,13 @@
           </a:solidFill>
           <a:ln/>
         </p:spPr>
+        <p:txBody>
+          <a:bodyPr/>
+          <a:lstStyle/>
+          <a:p>
+            <a:endParaRPr lang="en-DE"/>
+          </a:p>
+        </p:txBody>
       </p:sp>
       <p:sp>
         <p:nvSpPr>
@@ -12285,6 +13349,13 @@
           </a:solidFill>
           <a:ln/>
         </p:spPr>
+        <p:txBody>
+          <a:bodyPr/>
+          <a:lstStyle/>
+          <a:p>
+            <a:endParaRPr lang="en-DE"/>
+          </a:p>
+        </p:txBody>
       </p:sp>
       <p:pic>
         <p:nvPicPr>
@@ -12458,6 +13529,13 @@
             </a:outerShdw>
           </a:effectLst>
         </p:spPr>
+        <p:txBody>
+          <a:bodyPr/>
+          <a:lstStyle/>
+          <a:p>
+            <a:endParaRPr lang="en-DE"/>
+          </a:p>
+        </p:txBody>
       </p:sp>
       <p:sp>
         <p:nvSpPr>
@@ -12478,6 +13556,13 @@
           </a:solidFill>
           <a:ln/>
         </p:spPr>
+        <p:txBody>
+          <a:bodyPr/>
+          <a:lstStyle/>
+          <a:p>
+            <a:endParaRPr lang="en-DE"/>
+          </a:p>
+        </p:txBody>
       </p:sp>
       <p:sp>
         <p:nvSpPr>
@@ -12498,6 +13583,13 @@
           </a:solidFill>
           <a:ln/>
         </p:spPr>
+        <p:txBody>
+          <a:bodyPr/>
+          <a:lstStyle/>
+          <a:p>
+            <a:endParaRPr lang="en-DE"/>
+          </a:p>
+        </p:txBody>
       </p:sp>
       <p:pic>
         <p:nvPicPr>
@@ -12671,6 +13763,13 @@
             </a:outerShdw>
           </a:effectLst>
         </p:spPr>
+        <p:txBody>
+          <a:bodyPr/>
+          <a:lstStyle/>
+          <a:p>
+            <a:endParaRPr lang="en-DE"/>
+          </a:p>
+        </p:txBody>
       </p:sp>
       <p:sp>
         <p:nvSpPr>
@@ -12691,6 +13790,13 @@
           </a:solidFill>
           <a:ln/>
         </p:spPr>
+        <p:txBody>
+          <a:bodyPr/>
+          <a:lstStyle/>
+          <a:p>
+            <a:endParaRPr lang="en-DE"/>
+          </a:p>
+        </p:txBody>
       </p:sp>
       <p:sp>
         <p:nvSpPr>
@@ -12711,6 +13817,13 @@
           </a:solidFill>
           <a:ln/>
         </p:spPr>
+        <p:txBody>
+          <a:bodyPr/>
+          <a:lstStyle/>
+          <a:p>
+            <a:endParaRPr lang="en-DE"/>
+          </a:p>
+        </p:txBody>
       </p:sp>
       <p:pic>
         <p:nvPicPr>
@@ -12884,6 +13997,13 @@
             </a:outerShdw>
           </a:effectLst>
         </p:spPr>
+        <p:txBody>
+          <a:bodyPr/>
+          <a:lstStyle/>
+          <a:p>
+            <a:endParaRPr lang="en-DE"/>
+          </a:p>
+        </p:txBody>
       </p:sp>
       <p:sp>
         <p:nvSpPr>
@@ -12904,6 +14024,13 @@
           </a:solidFill>
           <a:ln/>
         </p:spPr>
+        <p:txBody>
+          <a:bodyPr/>
+          <a:lstStyle/>
+          <a:p>
+            <a:endParaRPr lang="en-DE"/>
+          </a:p>
+        </p:txBody>
       </p:sp>
       <p:sp>
         <p:nvSpPr>
@@ -12924,6 +14051,13 @@
           </a:solidFill>
           <a:ln/>
         </p:spPr>
+        <p:txBody>
+          <a:bodyPr/>
+          <a:lstStyle/>
+          <a:p>
+            <a:endParaRPr lang="en-DE"/>
+          </a:p>
+        </p:txBody>
       </p:sp>
       <p:pic>
         <p:nvPicPr>
@@ -13118,6 +14252,13 @@
           </a:solidFill>
           <a:ln/>
         </p:spPr>
+        <p:txBody>
+          <a:bodyPr/>
+          <a:lstStyle/>
+          <a:p>
+            <a:endParaRPr lang="en-DE"/>
+          </a:p>
+        </p:txBody>
       </p:sp>
       <p:sp>
         <p:nvSpPr>
@@ -13138,6 +14279,13 @@
           </a:solidFill>
           <a:ln/>
         </p:spPr>
+        <p:txBody>
+          <a:bodyPr/>
+          <a:lstStyle/>
+          <a:p>
+            <a:endParaRPr lang="en-DE"/>
+          </a:p>
+        </p:txBody>
       </p:sp>
       <p:sp>
         <p:nvSpPr>
@@ -13360,6 +14508,13 @@
             </a:outerShdw>
           </a:effectLst>
         </p:spPr>
+        <p:txBody>
+          <a:bodyPr/>
+          <a:lstStyle/>
+          <a:p>
+            <a:endParaRPr lang="en-DE"/>
+          </a:p>
+        </p:txBody>
       </p:sp>
       <p:sp>
         <p:nvSpPr>
@@ -13465,6 +14620,13 @@
             <a:prstDash val="solid"/>
           </a:ln>
         </p:spPr>
+        <p:txBody>
+          <a:bodyPr/>
+          <a:lstStyle/>
+          <a:p>
+            <a:endParaRPr lang="en-DE"/>
+          </a:p>
+        </p:txBody>
       </p:sp>
       <p:sp>
         <p:nvSpPr>
@@ -13531,6 +14693,13 @@
             <a:prstDash val="solid"/>
           </a:ln>
         </p:spPr>
+        <p:txBody>
+          <a:bodyPr/>
+          <a:lstStyle/>
+          <a:p>
+            <a:endParaRPr lang="en-DE"/>
+          </a:p>
+        </p:txBody>
       </p:sp>
       <p:sp>
         <p:nvSpPr>
@@ -13597,6 +14766,13 @@
             <a:prstDash val="solid"/>
           </a:ln>
         </p:spPr>
+        <p:txBody>
+          <a:bodyPr/>
+          <a:lstStyle/>
+          <a:p>
+            <a:endParaRPr lang="en-DE"/>
+          </a:p>
+        </p:txBody>
       </p:sp>
       <p:sp>
         <p:nvSpPr>
@@ -13663,6 +14839,13 @@
             <a:prstDash val="solid"/>
           </a:ln>
         </p:spPr>
+        <p:txBody>
+          <a:bodyPr/>
+          <a:lstStyle/>
+          <a:p>
+            <a:endParaRPr lang="en-DE"/>
+          </a:p>
+        </p:txBody>
       </p:sp>
       <p:sp>
         <p:nvSpPr>
@@ -13729,6 +14912,13 @@
             <a:prstDash val="solid"/>
           </a:ln>
         </p:spPr>
+        <p:txBody>
+          <a:bodyPr/>
+          <a:lstStyle/>
+          <a:p>
+            <a:endParaRPr lang="en-DE"/>
+          </a:p>
+        </p:txBody>
       </p:sp>
       <p:sp>
         <p:nvSpPr>
@@ -13834,6 +15024,13 @@
             </a:outerShdw>
           </a:effectLst>
         </p:spPr>
+        <p:txBody>
+          <a:bodyPr/>
+          <a:lstStyle/>
+          <a:p>
+            <a:endParaRPr lang="en-DE"/>
+          </a:p>
+        </p:txBody>
       </p:sp>
       <p:sp>
         <p:nvSpPr>
@@ -13896,6 +15093,13 @@
             <a:prstDash val="solid"/>
           </a:ln>
         </p:spPr>
+        <p:txBody>
+          <a:bodyPr/>
+          <a:lstStyle/>
+          <a:p>
+            <a:endParaRPr lang="en-DE"/>
+          </a:p>
+        </p:txBody>
       </p:sp>
       <p:sp>
         <p:nvSpPr>
@@ -13919,6 +15123,13 @@
             <a:prstDash val="solid"/>
           </a:ln>
         </p:spPr>
+        <p:txBody>
+          <a:bodyPr/>
+          <a:lstStyle/>
+          <a:p>
+            <a:endParaRPr lang="en-DE"/>
+          </a:p>
+        </p:txBody>
       </p:sp>
       <p:sp>
         <p:nvSpPr>
@@ -13942,6 +15153,13 @@
             <a:prstDash val="solid"/>
           </a:ln>
         </p:spPr>
+        <p:txBody>
+          <a:bodyPr/>
+          <a:lstStyle/>
+          <a:p>
+            <a:endParaRPr lang="en-DE"/>
+          </a:p>
+        </p:txBody>
       </p:sp>
       <p:sp>
         <p:nvSpPr>
@@ -13965,6 +15183,13 @@
             <a:prstDash val="solid"/>
           </a:ln>
         </p:spPr>
+        <p:txBody>
+          <a:bodyPr/>
+          <a:lstStyle/>
+          <a:p>
+            <a:endParaRPr lang="en-DE"/>
+          </a:p>
+        </p:txBody>
       </p:sp>
       <p:sp>
         <p:nvSpPr>
@@ -13988,6 +15213,13 @@
             <a:prstDash val="solid"/>
           </a:ln>
         </p:spPr>
+        <p:txBody>
+          <a:bodyPr/>
+          <a:lstStyle/>
+          <a:p>
+            <a:endParaRPr lang="en-DE"/>
+          </a:p>
+        </p:txBody>
       </p:sp>
       <p:sp>
         <p:nvSpPr>
@@ -14011,6 +15243,13 @@
             <a:prstDash val="solid"/>
           </a:ln>
         </p:spPr>
+        <p:txBody>
+          <a:bodyPr/>
+          <a:lstStyle/>
+          <a:p>
+            <a:endParaRPr lang="en-DE"/>
+          </a:p>
+        </p:txBody>
       </p:sp>
       <p:sp>
         <p:nvSpPr>
@@ -14034,6 +15273,13 @@
             <a:prstDash val="solid"/>
           </a:ln>
         </p:spPr>
+        <p:txBody>
+          <a:bodyPr/>
+          <a:lstStyle/>
+          <a:p>
+            <a:endParaRPr lang="en-DE"/>
+          </a:p>
+        </p:txBody>
       </p:sp>
       <p:sp>
         <p:nvSpPr>
@@ -14054,6 +15300,13 @@
           </a:solidFill>
           <a:ln/>
         </p:spPr>
+        <p:txBody>
+          <a:bodyPr/>
+          <a:lstStyle/>
+          <a:p>
+            <a:endParaRPr lang="en-DE"/>
+          </a:p>
+        </p:txBody>
       </p:sp>
       <p:sp>
         <p:nvSpPr>
@@ -14074,6 +15327,13 @@
           </a:solidFill>
           <a:ln/>
         </p:spPr>
+        <p:txBody>
+          <a:bodyPr/>
+          <a:lstStyle/>
+          <a:p>
+            <a:endParaRPr lang="en-DE"/>
+          </a:p>
+        </p:txBody>
       </p:sp>
       <p:sp>
         <p:nvSpPr>
@@ -14094,6 +15354,13 @@
           </a:solidFill>
           <a:ln/>
         </p:spPr>
+        <p:txBody>
+          <a:bodyPr/>
+          <a:lstStyle/>
+          <a:p>
+            <a:endParaRPr lang="en-DE"/>
+          </a:p>
+        </p:txBody>
       </p:sp>
       <p:sp>
         <p:nvSpPr>
@@ -14114,6 +15381,13 @@
           </a:solidFill>
           <a:ln/>
         </p:spPr>
+        <p:txBody>
+          <a:bodyPr/>
+          <a:lstStyle/>
+          <a:p>
+            <a:endParaRPr lang="en-DE"/>
+          </a:p>
+        </p:txBody>
       </p:sp>
       <p:sp>
         <p:nvSpPr>
@@ -14134,6 +15408,13 @@
           </a:solidFill>
           <a:ln/>
         </p:spPr>
+        <p:txBody>
+          <a:bodyPr/>
+          <a:lstStyle/>
+          <a:p>
+            <a:endParaRPr lang="en-DE"/>
+          </a:p>
+        </p:txBody>
       </p:sp>
       <p:sp>
         <p:nvSpPr>
@@ -14154,6 +15435,13 @@
           </a:solidFill>
           <a:ln/>
         </p:spPr>
+        <p:txBody>
+          <a:bodyPr/>
+          <a:lstStyle/>
+          <a:p>
+            <a:endParaRPr lang="en-DE"/>
+          </a:p>
+        </p:txBody>
       </p:sp>
       <p:sp>
         <p:nvSpPr>
@@ -14174,6 +15462,13 @@
           </a:solidFill>
           <a:ln/>
         </p:spPr>
+        <p:txBody>
+          <a:bodyPr/>
+          <a:lstStyle/>
+          <a:p>
+            <a:endParaRPr lang="en-DE"/>
+          </a:p>
+        </p:txBody>
       </p:sp>
       <p:pic>
         <p:nvPicPr>
@@ -14218,6 +15513,13 @@
           </a:solidFill>
           <a:ln/>
         </p:spPr>
+        <p:txBody>
+          <a:bodyPr/>
+          <a:lstStyle/>
+          <a:p>
+            <a:endParaRPr lang="en-DE"/>
+          </a:p>
+        </p:txBody>
       </p:sp>
       <p:pic>
         <p:nvPicPr>
@@ -14262,6 +15564,13 @@
           </a:solidFill>
           <a:ln/>
         </p:spPr>
+        <p:txBody>
+          <a:bodyPr/>
+          <a:lstStyle/>
+          <a:p>
+            <a:endParaRPr lang="en-DE"/>
+          </a:p>
+        </p:txBody>
       </p:sp>
       <p:pic>
         <p:nvPicPr>
@@ -14378,6 +15687,13 @@
           </a:solidFill>
           <a:ln/>
         </p:spPr>
+        <p:txBody>
+          <a:bodyPr/>
+          <a:lstStyle/>
+          <a:p>
+            <a:endParaRPr lang="en-DE"/>
+          </a:p>
+        </p:txBody>
       </p:sp>
       <p:sp>
         <p:nvSpPr>
@@ -14398,6 +15714,13 @@
           </a:solidFill>
           <a:ln/>
         </p:spPr>
+        <p:txBody>
+          <a:bodyPr/>
+          <a:lstStyle/>
+          <a:p>
+            <a:endParaRPr lang="en-DE"/>
+          </a:p>
+        </p:txBody>
       </p:sp>
       <p:sp>
         <p:nvSpPr>
@@ -14625,6 +15948,13 @@
             </a:outerShdw>
           </a:effectLst>
         </p:spPr>
+        <p:txBody>
+          <a:bodyPr/>
+          <a:lstStyle/>
+          <a:p>
+            <a:endParaRPr lang="en-DE"/>
+          </a:p>
+        </p:txBody>
       </p:sp>
       <p:sp>
         <p:nvSpPr>
@@ -14645,6 +15975,13 @@
           </a:solidFill>
           <a:ln/>
         </p:spPr>
+        <p:txBody>
+          <a:bodyPr/>
+          <a:lstStyle/>
+          <a:p>
+            <a:endParaRPr lang="en-DE"/>
+          </a:p>
+        </p:txBody>
       </p:sp>
       <p:sp>
         <p:nvSpPr>
@@ -14665,6 +16002,13 @@
           </a:solidFill>
           <a:ln/>
         </p:spPr>
+        <p:txBody>
+          <a:bodyPr/>
+          <a:lstStyle/>
+          <a:p>
+            <a:endParaRPr lang="en-DE"/>
+          </a:p>
+        </p:txBody>
       </p:sp>
       <p:pic>
         <p:nvPicPr>
@@ -14799,6 +16143,13 @@
             </a:outerShdw>
           </a:effectLst>
         </p:spPr>
+        <p:txBody>
+          <a:bodyPr/>
+          <a:lstStyle/>
+          <a:p>
+            <a:endParaRPr lang="en-DE"/>
+          </a:p>
+        </p:txBody>
       </p:sp>
       <p:sp>
         <p:nvSpPr>
@@ -14819,6 +16170,13 @@
           </a:solidFill>
           <a:ln/>
         </p:spPr>
+        <p:txBody>
+          <a:bodyPr/>
+          <a:lstStyle/>
+          <a:p>
+            <a:endParaRPr lang="en-DE"/>
+          </a:p>
+        </p:txBody>
       </p:sp>
       <p:sp>
         <p:nvSpPr>
@@ -14839,6 +16197,13 @@
           </a:solidFill>
           <a:ln/>
         </p:spPr>
+        <p:txBody>
+          <a:bodyPr/>
+          <a:lstStyle/>
+          <a:p>
+            <a:endParaRPr lang="en-DE"/>
+          </a:p>
+        </p:txBody>
       </p:sp>
       <p:pic>
         <p:nvPicPr>
@@ -14973,6 +16338,13 @@
             </a:outerShdw>
           </a:effectLst>
         </p:spPr>
+        <p:txBody>
+          <a:bodyPr/>
+          <a:lstStyle/>
+          <a:p>
+            <a:endParaRPr lang="en-DE"/>
+          </a:p>
+        </p:txBody>
       </p:sp>
       <p:sp>
         <p:nvSpPr>
@@ -14993,6 +16365,13 @@
           </a:solidFill>
           <a:ln/>
         </p:spPr>
+        <p:txBody>
+          <a:bodyPr/>
+          <a:lstStyle/>
+          <a:p>
+            <a:endParaRPr lang="en-DE"/>
+          </a:p>
+        </p:txBody>
       </p:sp>
       <p:sp>
         <p:nvSpPr>
@@ -15013,6 +16392,13 @@
           </a:solidFill>
           <a:ln/>
         </p:spPr>
+        <p:txBody>
+          <a:bodyPr/>
+          <a:lstStyle/>
+          <a:p>
+            <a:endParaRPr lang="en-DE"/>
+          </a:p>
+        </p:txBody>
       </p:sp>
       <p:pic>
         <p:nvPicPr>
@@ -15147,6 +16533,13 @@
             </a:outerShdw>
           </a:effectLst>
         </p:spPr>
+        <p:txBody>
+          <a:bodyPr/>
+          <a:lstStyle/>
+          <a:p>
+            <a:endParaRPr lang="en-DE"/>
+          </a:p>
+        </p:txBody>
       </p:sp>
       <p:sp>
         <p:nvSpPr>
@@ -15167,6 +16560,13 @@
           </a:solidFill>
           <a:ln/>
         </p:spPr>
+        <p:txBody>
+          <a:bodyPr/>
+          <a:lstStyle/>
+          <a:p>
+            <a:endParaRPr lang="en-DE"/>
+          </a:p>
+        </p:txBody>
       </p:sp>
       <p:sp>
         <p:nvSpPr>
@@ -15187,6 +16587,13 @@
           </a:solidFill>
           <a:ln/>
         </p:spPr>
+        <p:txBody>
+          <a:bodyPr/>
+          <a:lstStyle/>
+          <a:p>
+            <a:endParaRPr lang="en-DE"/>
+          </a:p>
+        </p:txBody>
       </p:sp>
       <p:pic>
         <p:nvPicPr>
@@ -15321,6 +16728,13 @@
             </a:outerShdw>
           </a:effectLst>
         </p:spPr>
+        <p:txBody>
+          <a:bodyPr/>
+          <a:lstStyle/>
+          <a:p>
+            <a:endParaRPr lang="en-DE"/>
+          </a:p>
+        </p:txBody>
       </p:sp>
       <p:sp>
         <p:nvSpPr>
@@ -15341,6 +16755,13 @@
           </a:solidFill>
           <a:ln/>
         </p:spPr>
+        <p:txBody>
+          <a:bodyPr/>
+          <a:lstStyle/>
+          <a:p>
+            <a:endParaRPr lang="en-DE"/>
+          </a:p>
+        </p:txBody>
       </p:sp>
       <p:sp>
         <p:nvSpPr>
@@ -15361,6 +16782,13 @@
           </a:solidFill>
           <a:ln/>
         </p:spPr>
+        <p:txBody>
+          <a:bodyPr/>
+          <a:lstStyle/>
+          <a:p>
+            <a:endParaRPr lang="en-DE"/>
+          </a:p>
+        </p:txBody>
       </p:sp>
       <p:pic>
         <p:nvPicPr>
@@ -15495,6 +16923,13 @@
             </a:outerShdw>
           </a:effectLst>
         </p:spPr>
+        <p:txBody>
+          <a:bodyPr/>
+          <a:lstStyle/>
+          <a:p>
+            <a:endParaRPr lang="en-DE"/>
+          </a:p>
+        </p:txBody>
       </p:sp>
       <p:sp>
         <p:nvSpPr>
@@ -15515,6 +16950,13 @@
           </a:solidFill>
           <a:ln/>
         </p:spPr>
+        <p:txBody>
+          <a:bodyPr/>
+          <a:lstStyle/>
+          <a:p>
+            <a:endParaRPr lang="en-DE"/>
+          </a:p>
+        </p:txBody>
       </p:sp>
       <p:sp>
         <p:nvSpPr>
@@ -15535,6 +16977,13 @@
           </a:solidFill>
           <a:ln/>
         </p:spPr>
+        <p:txBody>
+          <a:bodyPr/>
+          <a:lstStyle/>
+          <a:p>
+            <a:endParaRPr lang="en-DE"/>
+          </a:p>
+        </p:txBody>
       </p:sp>
       <p:pic>
         <p:nvPicPr>
@@ -15669,6 +17118,13 @@
             </a:outerShdw>
           </a:effectLst>
         </p:spPr>
+        <p:txBody>
+          <a:bodyPr/>
+          <a:lstStyle/>
+          <a:p>
+            <a:endParaRPr lang="en-DE"/>
+          </a:p>
+        </p:txBody>
       </p:sp>
       <p:sp>
         <p:nvSpPr>
@@ -15689,6 +17145,13 @@
           </a:solidFill>
           <a:ln/>
         </p:spPr>
+        <p:txBody>
+          <a:bodyPr/>
+          <a:lstStyle/>
+          <a:p>
+            <a:endParaRPr lang="en-DE"/>
+          </a:p>
+        </p:txBody>
       </p:sp>
       <p:sp>
         <p:nvSpPr>
@@ -15709,6 +17172,13 @@
           </a:solidFill>
           <a:ln/>
         </p:spPr>
+        <p:txBody>
+          <a:bodyPr/>
+          <a:lstStyle/>
+          <a:p>
+            <a:endParaRPr lang="en-DE"/>
+          </a:p>
+        </p:txBody>
       </p:sp>
       <p:pic>
         <p:nvPicPr>
@@ -15843,6 +17313,13 @@
             </a:outerShdw>
           </a:effectLst>
         </p:spPr>
+        <p:txBody>
+          <a:bodyPr/>
+          <a:lstStyle/>
+          <a:p>
+            <a:endParaRPr lang="en-DE"/>
+          </a:p>
+        </p:txBody>
       </p:sp>
       <p:sp>
         <p:nvSpPr>
@@ -15863,6 +17340,13 @@
           </a:solidFill>
           <a:ln/>
         </p:spPr>
+        <p:txBody>
+          <a:bodyPr/>
+          <a:lstStyle/>
+          <a:p>
+            <a:endParaRPr lang="en-DE"/>
+          </a:p>
+        </p:txBody>
       </p:sp>
       <p:sp>
         <p:nvSpPr>
@@ -15883,6 +17367,13 @@
           </a:solidFill>
           <a:ln/>
         </p:spPr>
+        <p:txBody>
+          <a:bodyPr/>
+          <a:lstStyle/>
+          <a:p>
+            <a:endParaRPr lang="en-DE"/>
+          </a:p>
+        </p:txBody>
       </p:sp>
       <p:pic>
         <p:nvPicPr>
@@ -16038,6 +17529,13 @@
           </a:solidFill>
           <a:ln/>
         </p:spPr>
+        <p:txBody>
+          <a:bodyPr/>
+          <a:lstStyle/>
+          <a:p>
+            <a:endParaRPr lang="en-DE"/>
+          </a:p>
+        </p:txBody>
       </p:sp>
       <p:sp>
         <p:nvSpPr>
@@ -16058,6 +17556,13 @@
           </a:solidFill>
           <a:ln/>
         </p:spPr>
+        <p:txBody>
+          <a:bodyPr/>
+          <a:lstStyle/>
+          <a:p>
+            <a:endParaRPr lang="en-DE"/>
+          </a:p>
+        </p:txBody>
       </p:sp>
       <p:sp>
         <p:nvSpPr>
@@ -16280,6 +17785,13 @@
             </a:outerShdw>
           </a:effectLst>
         </p:spPr>
+        <p:txBody>
+          <a:bodyPr/>
+          <a:lstStyle/>
+          <a:p>
+            <a:endParaRPr lang="en-DE"/>
+          </a:p>
+        </p:txBody>
       </p:sp>
       <p:sp>
         <p:nvSpPr>
@@ -16383,6 +17895,13 @@
             <a:prstDash val="solid"/>
           </a:ln>
         </p:spPr>
+        <p:txBody>
+          <a:bodyPr/>
+          <a:lstStyle/>
+          <a:p>
+            <a:endParaRPr lang="en-DE"/>
+          </a:p>
+        </p:txBody>
       </p:sp>
       <p:sp>
         <p:nvSpPr>
@@ -16403,6 +17922,13 @@
           </a:solidFill>
           <a:ln/>
         </p:spPr>
+        <p:txBody>
+          <a:bodyPr/>
+          <a:lstStyle/>
+          <a:p>
+            <a:endParaRPr lang="en-DE"/>
+          </a:p>
+        </p:txBody>
       </p:sp>
       <p:pic>
         <p:nvPicPr>
@@ -16530,6 +18056,13 @@
             <a:prstDash val="solid"/>
           </a:ln>
         </p:spPr>
+        <p:txBody>
+          <a:bodyPr/>
+          <a:lstStyle/>
+          <a:p>
+            <a:endParaRPr lang="en-DE"/>
+          </a:p>
+        </p:txBody>
       </p:sp>
       <p:sp>
         <p:nvSpPr>
@@ -16550,6 +18083,13 @@
           </a:solidFill>
           <a:ln/>
         </p:spPr>
+        <p:txBody>
+          <a:bodyPr/>
+          <a:lstStyle/>
+          <a:p>
+            <a:endParaRPr lang="en-DE"/>
+          </a:p>
+        </p:txBody>
       </p:sp>
       <p:pic>
         <p:nvPicPr>
@@ -16716,6 +18256,13 @@
             <a:prstDash val="solid"/>
           </a:ln>
         </p:spPr>
+        <p:txBody>
+          <a:bodyPr/>
+          <a:lstStyle/>
+          <a:p>
+            <a:endParaRPr lang="en-DE"/>
+          </a:p>
+        </p:txBody>
       </p:sp>
       <p:sp>
         <p:nvSpPr>
@@ -16819,6 +18366,13 @@
             <a:prstDash val="solid"/>
           </a:ln>
         </p:spPr>
+        <p:txBody>
+          <a:bodyPr/>
+          <a:lstStyle/>
+          <a:p>
+            <a:endParaRPr lang="en-DE"/>
+          </a:p>
+        </p:txBody>
       </p:sp>
       <p:sp>
         <p:nvSpPr>
@@ -16922,6 +18476,13 @@
             <a:prstDash val="solid"/>
           </a:ln>
         </p:spPr>
+        <p:txBody>
+          <a:bodyPr/>
+          <a:lstStyle/>
+          <a:p>
+            <a:endParaRPr lang="en-DE"/>
+          </a:p>
+        </p:txBody>
       </p:sp>
       <p:sp>
         <p:nvSpPr>
@@ -17025,6 +18586,13 @@
             <a:prstDash val="solid"/>
           </a:ln>
         </p:spPr>
+        <p:txBody>
+          <a:bodyPr/>
+          <a:lstStyle/>
+          <a:p>
+            <a:endParaRPr lang="en-DE"/>
+          </a:p>
+        </p:txBody>
       </p:sp>
       <p:sp>
         <p:nvSpPr>
@@ -17128,6 +18696,13 @@
             <a:prstDash val="solid"/>
           </a:ln>
         </p:spPr>
+        <p:txBody>
+          <a:bodyPr/>
+          <a:lstStyle/>
+          <a:p>
+            <a:endParaRPr lang="en-DE"/>
+          </a:p>
+        </p:txBody>
       </p:sp>
       <p:sp>
         <p:nvSpPr>
@@ -17231,6 +18806,13 @@
             <a:prstDash val="solid"/>
           </a:ln>
         </p:spPr>
+        <p:txBody>
+          <a:bodyPr/>
+          <a:lstStyle/>
+          <a:p>
+            <a:endParaRPr lang="en-DE"/>
+          </a:p>
+        </p:txBody>
       </p:sp>
       <p:sp>
         <p:nvSpPr>
@@ -17334,6 +18916,13 @@
             <a:prstDash val="solid"/>
           </a:ln>
         </p:spPr>
+        <p:txBody>
+          <a:bodyPr/>
+          <a:lstStyle/>
+          <a:p>
+            <a:endParaRPr lang="en-DE"/>
+          </a:p>
+        </p:txBody>
       </p:sp>
       <p:sp>
         <p:nvSpPr>
@@ -17426,6 +19015,13 @@
           </a:solidFill>
           <a:ln/>
         </p:spPr>
+        <p:txBody>
+          <a:bodyPr/>
+          <a:lstStyle/>
+          <a:p>
+            <a:endParaRPr lang="en-DE"/>
+          </a:p>
+        </p:txBody>
       </p:sp>
       <p:sp>
         <p:nvSpPr>
@@ -17446,6 +19042,13 @@
           </a:solidFill>
           <a:ln/>
         </p:spPr>
+        <p:txBody>
+          <a:bodyPr/>
+          <a:lstStyle/>
+          <a:p>
+            <a:endParaRPr lang="en-DE"/>
+          </a:p>
+        </p:txBody>
       </p:sp>
       <p:sp>
         <p:nvSpPr>
@@ -17664,6 +19267,13 @@
             <a:prstDash val="dash"/>
           </a:ln>
         </p:spPr>
+        <p:txBody>
+          <a:bodyPr/>
+          <a:lstStyle/>
+          <a:p>
+            <a:endParaRPr lang="en-DE"/>
+          </a:p>
+        </p:txBody>
       </p:sp>
       <p:sp>
         <p:nvSpPr>
@@ -17684,6 +19294,13 @@
           </a:solidFill>
           <a:ln/>
         </p:spPr>
+        <p:txBody>
+          <a:bodyPr/>
+          <a:lstStyle/>
+          <a:p>
+            <a:endParaRPr lang="en-DE"/>
+          </a:p>
+        </p:txBody>
       </p:sp>
       <p:pic>
         <p:nvPicPr>
@@ -17733,6 +19350,13 @@
             <a:prstDash val="solid"/>
           </a:ln>
         </p:spPr>
+        <p:txBody>
+          <a:bodyPr/>
+          <a:lstStyle/>
+          <a:p>
+            <a:endParaRPr lang="en-DE"/>
+          </a:p>
+        </p:txBody>
       </p:sp>
       <p:sp>
         <p:nvSpPr>
@@ -17804,6 +19428,13 @@
             </a:outerShdw>
           </a:effectLst>
         </p:spPr>
+        <p:txBody>
+          <a:bodyPr/>
+          <a:lstStyle/>
+          <a:p>
+            <a:endParaRPr lang="en-DE"/>
+          </a:p>
+        </p:txBody>
       </p:sp>
       <p:sp>
         <p:nvSpPr>
@@ -17824,6 +19455,13 @@
           </a:solidFill>
           <a:ln/>
         </p:spPr>
+        <p:txBody>
+          <a:bodyPr/>
+          <a:lstStyle/>
+          <a:p>
+            <a:endParaRPr lang="en-DE"/>
+          </a:p>
+        </p:txBody>
       </p:sp>
       <p:sp>
         <p:nvSpPr>
@@ -17922,6 +19560,13 @@
           </a:solidFill>
           <a:ln/>
         </p:spPr>
+        <p:txBody>
+          <a:bodyPr/>
+          <a:lstStyle/>
+          <a:p>
+            <a:endParaRPr lang="en-DE"/>
+          </a:p>
+        </p:txBody>
       </p:sp>
       <p:pic>
         <p:nvPicPr>
@@ -17971,6 +19616,13 @@
             <a:prstDash val="solid"/>
           </a:ln>
         </p:spPr>
+        <p:txBody>
+          <a:bodyPr/>
+          <a:lstStyle/>
+          <a:p>
+            <a:endParaRPr lang="en-DE"/>
+          </a:p>
+        </p:txBody>
       </p:sp>
       <p:sp>
         <p:nvSpPr>
@@ -18042,6 +19694,13 @@
             </a:outerShdw>
           </a:effectLst>
         </p:spPr>
+        <p:txBody>
+          <a:bodyPr/>
+          <a:lstStyle/>
+          <a:p>
+            <a:endParaRPr lang="en-DE"/>
+          </a:p>
+        </p:txBody>
       </p:sp>
       <p:sp>
         <p:nvSpPr>
@@ -18062,6 +19721,13 @@
           </a:solidFill>
           <a:ln/>
         </p:spPr>
+        <p:txBody>
+          <a:bodyPr/>
+          <a:lstStyle/>
+          <a:p>
+            <a:endParaRPr lang="en-DE"/>
+          </a:p>
+        </p:txBody>
       </p:sp>
       <p:sp>
         <p:nvSpPr>
@@ -18160,6 +19826,13 @@
           </a:solidFill>
           <a:ln/>
         </p:spPr>
+        <p:txBody>
+          <a:bodyPr/>
+          <a:lstStyle/>
+          <a:p>
+            <a:endParaRPr lang="en-DE"/>
+          </a:p>
+        </p:txBody>
       </p:sp>
       <p:pic>
         <p:nvPicPr>
@@ -18209,6 +19882,13 @@
             <a:prstDash val="solid"/>
           </a:ln>
         </p:spPr>
+        <p:txBody>
+          <a:bodyPr/>
+          <a:lstStyle/>
+          <a:p>
+            <a:endParaRPr lang="en-DE"/>
+          </a:p>
+        </p:txBody>
       </p:sp>
       <p:sp>
         <p:nvSpPr>
@@ -18280,6 +19960,13 @@
             </a:outerShdw>
           </a:effectLst>
         </p:spPr>
+        <p:txBody>
+          <a:bodyPr/>
+          <a:lstStyle/>
+          <a:p>
+            <a:endParaRPr lang="en-DE"/>
+          </a:p>
+        </p:txBody>
       </p:sp>
       <p:sp>
         <p:nvSpPr>
@@ -18300,6 +19987,13 @@
           </a:solidFill>
           <a:ln/>
         </p:spPr>
+        <p:txBody>
+          <a:bodyPr/>
+          <a:lstStyle/>
+          <a:p>
+            <a:endParaRPr lang="en-DE"/>
+          </a:p>
+        </p:txBody>
       </p:sp>
       <p:sp>
         <p:nvSpPr>
@@ -18398,6 +20092,13 @@
           </a:solidFill>
           <a:ln/>
         </p:spPr>
+        <p:txBody>
+          <a:bodyPr/>
+          <a:lstStyle/>
+          <a:p>
+            <a:endParaRPr lang="en-DE"/>
+          </a:p>
+        </p:txBody>
       </p:sp>
       <p:pic>
         <p:nvPicPr>
@@ -18447,6 +20148,13 @@
             <a:prstDash val="solid"/>
           </a:ln>
         </p:spPr>
+        <p:txBody>
+          <a:bodyPr/>
+          <a:lstStyle/>
+          <a:p>
+            <a:endParaRPr lang="en-DE"/>
+          </a:p>
+        </p:txBody>
       </p:sp>
       <p:sp>
         <p:nvSpPr>
@@ -18518,6 +20226,13 @@
             </a:outerShdw>
           </a:effectLst>
         </p:spPr>
+        <p:txBody>
+          <a:bodyPr/>
+          <a:lstStyle/>
+          <a:p>
+            <a:endParaRPr lang="en-DE"/>
+          </a:p>
+        </p:txBody>
       </p:sp>
       <p:sp>
         <p:nvSpPr>
@@ -18538,6 +20253,13 @@
           </a:solidFill>
           <a:ln/>
         </p:spPr>
+        <p:txBody>
+          <a:bodyPr/>
+          <a:lstStyle/>
+          <a:p>
+            <a:endParaRPr lang="en-DE"/>
+          </a:p>
+        </p:txBody>
       </p:sp>
       <p:sp>
         <p:nvSpPr>
@@ -18669,6 +20391,13 @@
           </a:solidFill>
           <a:ln/>
         </p:spPr>
+        <p:txBody>
+          <a:bodyPr/>
+          <a:lstStyle/>
+          <a:p>
+            <a:endParaRPr lang="en-DE"/>
+          </a:p>
+        </p:txBody>
       </p:sp>
       <p:sp>
         <p:nvSpPr>
@@ -18689,6 +20418,13 @@
           </a:solidFill>
           <a:ln/>
         </p:spPr>
+        <p:txBody>
+          <a:bodyPr/>
+          <a:lstStyle/>
+          <a:p>
+            <a:endParaRPr lang="en-DE"/>
+          </a:p>
+        </p:txBody>
       </p:sp>
       <p:sp>
         <p:nvSpPr>
@@ -18916,6 +20652,13 @@
             </a:outerShdw>
           </a:effectLst>
         </p:spPr>
+        <p:txBody>
+          <a:bodyPr/>
+          <a:lstStyle/>
+          <a:p>
+            <a:endParaRPr lang="en-DE"/>
+          </a:p>
+        </p:txBody>
       </p:sp>
       <p:sp>
         <p:nvSpPr>
@@ -18936,6 +20679,13 @@
           </a:solidFill>
           <a:ln/>
         </p:spPr>
+        <p:txBody>
+          <a:bodyPr/>
+          <a:lstStyle/>
+          <a:p>
+            <a:endParaRPr lang="en-DE"/>
+          </a:p>
+        </p:txBody>
       </p:sp>
       <p:sp>
         <p:nvSpPr>
@@ -18956,6 +20706,13 @@
           </a:solidFill>
           <a:ln/>
         </p:spPr>
+        <p:txBody>
+          <a:bodyPr/>
+          <a:lstStyle/>
+          <a:p>
+            <a:endParaRPr lang="en-DE"/>
+          </a:p>
+        </p:txBody>
       </p:sp>
       <p:pic>
         <p:nvPicPr>
@@ -19186,6 +20943,13 @@
             <a:tailEnd type="triangle"/>
           </a:ln>
         </p:spPr>
+        <p:txBody>
+          <a:bodyPr/>
+          <a:lstStyle/>
+          <a:p>
+            <a:endParaRPr lang="en-DE"/>
+          </a:p>
+        </p:txBody>
       </p:sp>
       <p:sp>
         <p:nvSpPr>
@@ -19257,6 +21021,13 @@
             </a:outerShdw>
           </a:effectLst>
         </p:spPr>
+        <p:txBody>
+          <a:bodyPr/>
+          <a:lstStyle/>
+          <a:p>
+            <a:endParaRPr lang="en-DE"/>
+          </a:p>
+        </p:txBody>
       </p:sp>
       <p:sp>
         <p:nvSpPr>
@@ -19277,6 +21048,13 @@
           </a:solidFill>
           <a:ln/>
         </p:spPr>
+        <p:txBody>
+          <a:bodyPr/>
+          <a:lstStyle/>
+          <a:p>
+            <a:endParaRPr lang="en-DE"/>
+          </a:p>
+        </p:txBody>
       </p:sp>
       <p:sp>
         <p:nvSpPr>
@@ -19297,6 +21075,13 @@
           </a:solidFill>
           <a:ln/>
         </p:spPr>
+        <p:txBody>
+          <a:bodyPr/>
+          <a:lstStyle/>
+          <a:p>
+            <a:endParaRPr lang="en-DE"/>
+          </a:p>
+        </p:txBody>
       </p:sp>
       <p:pic>
         <p:nvPicPr>
@@ -19527,6 +21312,13 @@
             <a:tailEnd type="triangle"/>
           </a:ln>
         </p:spPr>
+        <p:txBody>
+          <a:bodyPr/>
+          <a:lstStyle/>
+          <a:p>
+            <a:endParaRPr lang="en-DE"/>
+          </a:p>
+        </p:txBody>
       </p:sp>
       <p:sp>
         <p:nvSpPr>
@@ -19598,6 +21390,13 @@
             </a:outerShdw>
           </a:effectLst>
         </p:spPr>
+        <p:txBody>
+          <a:bodyPr/>
+          <a:lstStyle/>
+          <a:p>
+            <a:endParaRPr lang="en-DE"/>
+          </a:p>
+        </p:txBody>
       </p:sp>
       <p:sp>
         <p:nvSpPr>
@@ -19618,6 +21417,13 @@
           </a:solidFill>
           <a:ln/>
         </p:spPr>
+        <p:txBody>
+          <a:bodyPr/>
+          <a:lstStyle/>
+          <a:p>
+            <a:endParaRPr lang="en-DE"/>
+          </a:p>
+        </p:txBody>
       </p:sp>
       <p:sp>
         <p:nvSpPr>
@@ -19638,6 +21444,13 @@
           </a:solidFill>
           <a:ln/>
         </p:spPr>
+        <p:txBody>
+          <a:bodyPr/>
+          <a:lstStyle/>
+          <a:p>
+            <a:endParaRPr lang="en-DE"/>
+          </a:p>
+        </p:txBody>
       </p:sp>
       <p:pic>
         <p:nvPicPr>
@@ -19829,6 +21642,13 @@
             <a:prstDash val="solid"/>
           </a:ln>
         </p:spPr>
+        <p:txBody>
+          <a:bodyPr/>
+          <a:lstStyle/>
+          <a:p>
+            <a:endParaRPr lang="en-DE"/>
+          </a:p>
+        </p:txBody>
       </p:sp>
       <p:sp>
         <p:nvSpPr>
@@ -19849,6 +21669,13 @@
           </a:solidFill>
           <a:ln/>
         </p:spPr>
+        <p:txBody>
+          <a:bodyPr/>
+          <a:lstStyle/>
+          <a:p>
+            <a:endParaRPr lang="en-DE"/>
+          </a:p>
+        </p:txBody>
       </p:sp>
       <p:pic>
         <p:nvPicPr>
@@ -19976,6 +21803,13 @@
           </a:solidFill>
           <a:ln/>
         </p:spPr>
+        <p:txBody>
+          <a:bodyPr/>
+          <a:lstStyle/>
+          <a:p>
+            <a:endParaRPr lang="en-DE"/>
+          </a:p>
+        </p:txBody>
       </p:sp>
       <p:sp>
         <p:nvSpPr>
@@ -19996,6 +21830,13 @@
           </a:solidFill>
           <a:ln/>
         </p:spPr>
+        <p:txBody>
+          <a:bodyPr/>
+          <a:lstStyle/>
+          <a:p>
+            <a:endParaRPr lang="en-DE"/>
+          </a:p>
+        </p:txBody>
       </p:sp>
       <p:sp>
         <p:nvSpPr>
@@ -20223,6 +22064,13 @@
             </a:outerShdw>
           </a:effectLst>
         </p:spPr>
+        <p:txBody>
+          <a:bodyPr/>
+          <a:lstStyle/>
+          <a:p>
+            <a:endParaRPr lang="en-DE"/>
+          </a:p>
+        </p:txBody>
       </p:sp>
       <p:sp>
         <p:nvSpPr>
@@ -20243,6 +22091,13 @@
           </a:solidFill>
           <a:ln/>
         </p:spPr>
+        <p:txBody>
+          <a:bodyPr/>
+          <a:lstStyle/>
+          <a:p>
+            <a:endParaRPr lang="en-DE"/>
+          </a:p>
+        </p:txBody>
       </p:sp>
       <p:sp>
         <p:nvSpPr>
@@ -20263,6 +22118,13 @@
           </a:solidFill>
           <a:ln/>
         </p:spPr>
+        <p:txBody>
+          <a:bodyPr/>
+          <a:lstStyle/>
+          <a:p>
+            <a:endParaRPr lang="en-DE"/>
+          </a:p>
+        </p:txBody>
       </p:sp>
       <p:pic>
         <p:nvPicPr>
@@ -20436,6 +22298,13 @@
             </a:outerShdw>
           </a:effectLst>
         </p:spPr>
+        <p:txBody>
+          <a:bodyPr/>
+          <a:lstStyle/>
+          <a:p>
+            <a:endParaRPr lang="en-DE"/>
+          </a:p>
+        </p:txBody>
       </p:sp>
       <p:sp>
         <p:nvSpPr>
@@ -20456,6 +22325,13 @@
           </a:solidFill>
           <a:ln/>
         </p:spPr>
+        <p:txBody>
+          <a:bodyPr/>
+          <a:lstStyle/>
+          <a:p>
+            <a:endParaRPr lang="en-DE"/>
+          </a:p>
+        </p:txBody>
       </p:sp>
       <p:sp>
         <p:nvSpPr>
@@ -20476,6 +22352,13 @@
           </a:solidFill>
           <a:ln/>
         </p:spPr>
+        <p:txBody>
+          <a:bodyPr/>
+          <a:lstStyle/>
+          <a:p>
+            <a:endParaRPr lang="en-DE"/>
+          </a:p>
+        </p:txBody>
       </p:sp>
       <p:pic>
         <p:nvPicPr>
@@ -20649,6 +22532,13 @@
             </a:outerShdw>
           </a:effectLst>
         </p:spPr>
+        <p:txBody>
+          <a:bodyPr/>
+          <a:lstStyle/>
+          <a:p>
+            <a:endParaRPr lang="en-DE"/>
+          </a:p>
+        </p:txBody>
       </p:sp>
       <p:sp>
         <p:nvSpPr>
@@ -20669,6 +22559,13 @@
           </a:solidFill>
           <a:ln/>
         </p:spPr>
+        <p:txBody>
+          <a:bodyPr/>
+          <a:lstStyle/>
+          <a:p>
+            <a:endParaRPr lang="en-DE"/>
+          </a:p>
+        </p:txBody>
       </p:sp>
       <p:sp>
         <p:nvSpPr>
@@ -20689,6 +22586,13 @@
           </a:solidFill>
           <a:ln/>
         </p:spPr>
+        <p:txBody>
+          <a:bodyPr/>
+          <a:lstStyle/>
+          <a:p>
+            <a:endParaRPr lang="en-DE"/>
+          </a:p>
+        </p:txBody>
       </p:sp>
       <p:pic>
         <p:nvPicPr>
@@ -20862,6 +22766,13 @@
             </a:outerShdw>
           </a:effectLst>
         </p:spPr>
+        <p:txBody>
+          <a:bodyPr/>
+          <a:lstStyle/>
+          <a:p>
+            <a:endParaRPr lang="en-DE"/>
+          </a:p>
+        </p:txBody>
       </p:sp>
       <p:sp>
         <p:nvSpPr>
@@ -20882,6 +22793,13 @@
           </a:solidFill>
           <a:ln/>
         </p:spPr>
+        <p:txBody>
+          <a:bodyPr/>
+          <a:lstStyle/>
+          <a:p>
+            <a:endParaRPr lang="en-DE"/>
+          </a:p>
+        </p:txBody>
       </p:sp>
       <p:sp>
         <p:nvSpPr>
@@ -20902,6 +22820,13 @@
           </a:solidFill>
           <a:ln/>
         </p:spPr>
+        <p:txBody>
+          <a:bodyPr/>
+          <a:lstStyle/>
+          <a:p>
+            <a:endParaRPr lang="en-DE"/>
+          </a:p>
+        </p:txBody>
       </p:sp>
       <p:pic>
         <p:nvPicPr>
@@ -21096,6 +23021,13 @@
           </a:solidFill>
           <a:ln/>
         </p:spPr>
+        <p:txBody>
+          <a:bodyPr/>
+          <a:lstStyle/>
+          <a:p>
+            <a:endParaRPr lang="en-DE"/>
+          </a:p>
+        </p:txBody>
       </p:sp>
       <p:sp>
         <p:nvSpPr>
@@ -21116,6 +23048,13 @@
           </a:solidFill>
           <a:ln/>
         </p:spPr>
+        <p:txBody>
+          <a:bodyPr/>
+          <a:lstStyle/>
+          <a:p>
+            <a:endParaRPr lang="en-DE"/>
+          </a:p>
+        </p:txBody>
       </p:sp>
       <p:sp>
         <p:nvSpPr>
@@ -23713,6 +25652,13 @@
             </a:outerShdw>
           </a:effectLst>
         </p:spPr>
+        <p:txBody>
+          <a:bodyPr/>
+          <a:lstStyle/>
+          <a:p>
+            <a:endParaRPr lang="en-DE"/>
+          </a:p>
+        </p:txBody>
       </p:sp>
       <p:sp>
         <p:nvSpPr>
@@ -23862,6 +25808,13 @@
             </a:outerShdw>
           </a:effectLst>
         </p:spPr>
+        <p:txBody>
+          <a:bodyPr/>
+          <a:lstStyle/>
+          <a:p>
+            <a:endParaRPr lang="en-DE"/>
+          </a:p>
+        </p:txBody>
       </p:sp>
       <p:sp>
         <p:nvSpPr>
@@ -24011,6 +25964,13 @@
             </a:outerShdw>
           </a:effectLst>
         </p:spPr>
+        <p:txBody>
+          <a:bodyPr/>
+          <a:lstStyle/>
+          <a:p>
+            <a:endParaRPr lang="en-DE"/>
+          </a:p>
+        </p:txBody>
       </p:sp>
       <p:sp>
         <p:nvSpPr>
